--- a/output/LLM_Self_Correction_ICLR2024_Group_Presentation-final.pptx
+++ b/output/LLM_Self_Correction_ICLR2024_Group_Presentation-final.pptx
@@ -342,6 +342,9 @@
                 </c:pt>
                 <c:pt idx="1">
                   <c:v>-1.5</c:v>
+                </c:pt>
+                <c:pt idx="2">
+                  <c:v>0</c:v>
                 </c:pt>
               </c:numCache>
             </c:numRef>
@@ -33237,7 +33240,7 @@
               <a:buNone/>
             </a:pPr>
             <a:r>
-              <a:rPr lang="en-US" sz="1000" dirty="0">
+              <a:rPr lang="en-US" sz="900" dirty="0">
                 <a:solidFill>
                   <a:srgbClr val="64748B"/>
                 </a:solidFill>
@@ -33247,7 +33250,7 @@
               </a:rPr>
               <a:t>Frozen Weights</a:t>
             </a:r>
-            <a:endParaRPr lang="en-US" sz="1000" dirty="0"/>
+            <a:endParaRPr lang="en-US" sz="900" dirty="0"/>
           </a:p>
         </p:txBody>
       </p:sp>
@@ -34611,7 +34614,7 @@
           <p:nvPr>
             <p:extLst>
               <p:ext uri="{D42A27DB-BD31-4B8C-83A1-F6EECF244321}">
-                <p14:modId xmlns:p14="http://schemas.microsoft.com/office/powerpoint/2010/main" val="3137005941"/>
+                <p14:modId xmlns:p14="http://schemas.microsoft.com/office/powerpoint/2010/main" val="2353136879"/>
               </p:ext>
             </p:extLst>
           </p:nvPr>

--- a/output/LLM_Self_Correction_ICLR2024_Group_Presentation-final.pptx
+++ b/output/LLM_Self_Correction_ICLR2024_Group_Presentation-final.pptx
@@ -10,8 +10,8 @@
   <p:sldIdLst>
     <p:sldId id="256" r:id="rId2"/>
     <p:sldId id="257" r:id="rId3"/>
-    <p:sldId id="258" r:id="rId4"/>
-    <p:sldId id="259" r:id="rId5"/>
+    <p:sldId id="259" r:id="rId4"/>
+    <p:sldId id="258" r:id="rId5"/>
     <p:sldId id="260" r:id="rId6"/>
     <p:sldId id="290" r:id="rId7"/>
     <p:sldId id="261" r:id="rId8"/>
@@ -3907,7 +3907,7 @@
           <a:p>
             <a:r>
               <a:rPr lang="en-US" dirty="0"/>
-              <a:t>Speaker: Nafis Islam Kabbo explains why autoregressive generation causes error cascades in multi-step reasoning.</a:t>
+              <a:t>Speaker: Nafis Islam Kabbo explains the 3-step closed-loop self-correction pipeline.</a:t>
             </a:r>
           </a:p>
         </p:txBody>
@@ -3994,7 +3994,7 @@
           <a:p>
             <a:r>
               <a:rPr lang="en-US" dirty="0"/>
-              <a:t>Speaker: Nafis Islam Kabbo explains the 3-step closed-loop self-correction pipeline.</a:t>
+              <a:t>Speaker: Nafis Islam Kabbo explains why autoregressive generation causes error cascades in multi-step reasoning.</a:t>
             </a:r>
           </a:p>
         </p:txBody>
@@ -5125,7 +5125,7 @@
                 <a:ea typeface="Calibri" pitchFamily="34" charset="-122"/>
                 <a:cs typeface="Calibri" pitchFamily="34" charset="-120"/>
               </a:rPr>
-              <a:t>01/24</a:t>
+              <a:t>01/23</a:t>
             </a:r>
             <a:endParaRPr lang="en-US" sz="850" dirty="0"/>
           </a:p>
@@ -15916,7 +15916,7 @@
                 <a:ea typeface="Calibri" pitchFamily="34" charset="-122"/>
                 <a:cs typeface="Calibri" pitchFamily="34" charset="-120"/>
               </a:rPr>
-              <a:t>Table 2: GPT-3.5 and GPT-4 accuracy across two self-correction rounds</a:t>
+              <a:t>Table-1: GPT-3.5 and GPT-4 accuracy across two self-correction rounds</a:t>
             </a:r>
             <a:endParaRPr lang="en-US" sz="750" dirty="0"/>
           </a:p>
@@ -16469,7 +16469,7 @@
                 <a:ea typeface="Calibri" pitchFamily="34" charset="-122"/>
                 <a:cs typeface="Calibri" pitchFamily="34" charset="-120"/>
               </a:rPr>
-              <a:t>Table 3: GPT-4-Turbo and Llama-2 results across self-correction rounds</a:t>
+              <a:t>Table-2: GPT-4-Turbo and Llama-2 results across self-correction rounds</a:t>
             </a:r>
             <a:endParaRPr lang="en-US" sz="750" dirty="0"/>
           </a:p>
@@ -17328,7 +17328,7 @@
                 <a:ea typeface="Calibri" pitchFamily="34" charset="-122"/>
                 <a:cs typeface="Calibri" pitchFamily="34" charset="-120"/>
               </a:rPr>
-              <a:t>Figure 1: Answer transition dynamics after two self-correction rounds on GSM8K (GPT-3.5)</a:t>
+              <a:t>Figure-4: Answer transition dynamics after two self-correction rounds on GSM8K (GPT-3.5)</a:t>
             </a:r>
             <a:endParaRPr lang="en-US" sz="750" dirty="0"/>
           </a:p>
@@ -19746,7 +19746,7 @@
             </a:avLst>
           </a:prstGeom>
           <a:solidFill>
-            <a:srgbClr val="FFF1F2"/>
+            <a:srgbClr val="FFF2F2"/>
           </a:solidFill>
           <a:ln w="12700">
             <a:solidFill>
@@ -21132,7 +21132,7 @@
                 <a:ea typeface="Calibri" pitchFamily="34" charset="-122"/>
                 <a:cs typeface="Calibri" pitchFamily="34" charset="-120"/>
               </a:rPr>
-              <a:t>02/24</a:t>
+              <a:t>02/23</a:t>
             </a:r>
             <a:endParaRPr lang="en-US" sz="850" dirty="0"/>
           </a:p>
@@ -23356,10 +23356,21 @@
             </a:avLst>
           </a:prstGeom>
           <a:solidFill>
-            <a:srgbClr val="1E2761"/>
+            <a:srgbClr val="FFF2F2"/>
           </a:solidFill>
-          <a:ln/>
-        </p:spPr>
+          <a:ln>
+            <a:solidFill>
+              <a:srgbClr val="800020"/>
+            </a:solidFill>
+          </a:ln>
+        </p:spPr>
+        <p:txBody>
+          <a:bodyPr/>
+          <a:lstStyle/>
+          <a:p>
+            <a:endParaRPr lang="en-US" dirty="0"/>
+          </a:p>
+        </p:txBody>
       </p:sp>
       <p:sp>
         <p:nvSpPr>
@@ -23402,13 +23413,10 @@
                 <a:ea typeface="Calibri" pitchFamily="34" charset="-122"/>
                 <a:cs typeface="Calibri" pitchFamily="34" charset="-120"/>
               </a:rPr>
-              <a:t>CORE PRINCIPLE   </a:t>
+              <a:t>CORE PRINCIPLE:  </a:t>
             </a:r>
             <a:r>
               <a:rPr lang="en-US" sz="975" dirty="0">
-                <a:solidFill>
-                  <a:srgbClr val="FFFFFF"/>
-                </a:solidFill>
                 <a:latin typeface="Calibri" pitchFamily="34" charset="0"/>
                 <a:ea typeface="Calibri" pitchFamily="34" charset="-122"/>
                 <a:cs typeface="Calibri" pitchFamily="34" charset="-120"/>
@@ -24323,9 +24331,13 @@
             </a:avLst>
           </a:prstGeom>
           <a:solidFill>
-            <a:srgbClr val="2B2B33"/>
+            <a:srgbClr val="FFF2F2"/>
           </a:solidFill>
-          <a:ln/>
+          <a:ln>
+            <a:solidFill>
+              <a:srgbClr val="800020"/>
+            </a:solidFill>
+          </a:ln>
         </p:spPr>
       </p:sp>
       <p:sp>
@@ -24369,13 +24381,10 @@
                 <a:ea typeface="Calibri" pitchFamily="34" charset="-122"/>
                 <a:cs typeface="Calibri" pitchFamily="34" charset="-120"/>
               </a:rPr>
-              <a:t>KEY INSIGHT   </a:t>
+              <a:t>KEY INSIGHT:  </a:t>
             </a:r>
             <a:r>
               <a:rPr lang="en-US" sz="938" i="1" dirty="0">
-                <a:solidFill>
-                  <a:srgbClr val="FFFFFF"/>
-                </a:solidFill>
                 <a:latin typeface="Calibri" pitchFamily="34" charset="0"/>
                 <a:ea typeface="Calibri" pitchFamily="34" charset="-122"/>
                 <a:cs typeface="Calibri" pitchFamily="34" charset="-120"/>
@@ -25966,6 +25975,959 @@
 
 <file path=ppt/slides/slide3.xml><?xml version="1.0" encoding="utf-8"?>
 <p:sld xmlns:a="http://schemas.openxmlformats.org/drawingml/2006/main" xmlns:r="http://schemas.openxmlformats.org/officeDocument/2006/relationships" xmlns:p="http://schemas.openxmlformats.org/presentationml/2006/main">
+  <p:cSld name="Slide 4">
+    <p:bg>
+      <p:bgPr>
+        <a:solidFill>
+          <a:srgbClr val="FFFFFF"/>
+        </a:solidFill>
+        <a:effectLst/>
+      </p:bgPr>
+    </p:bg>
+    <p:spTree>
+      <p:nvGrpSpPr>
+        <p:cNvPr id="1" name=""/>
+        <p:cNvGrpSpPr/>
+        <p:nvPr/>
+      </p:nvGrpSpPr>
+      <p:grpSpPr>
+        <a:xfrm>
+          <a:off x="0" y="0"/>
+          <a:ext cx="0" cy="0"/>
+          <a:chOff x="0" y="0"/>
+          <a:chExt cx="0" cy="0"/>
+        </a:xfrm>
+      </p:grpSpPr>
+      <p:sp>
+        <p:nvSpPr>
+          <p:cNvPr id="2" name="Text 0"/>
+          <p:cNvSpPr/>
+          <p:nvPr/>
+        </p:nvSpPr>
+        <p:spPr>
+          <a:xfrm>
+            <a:off x="548640" y="201168"/>
+            <a:ext cx="8046720" cy="228600"/>
+          </a:xfrm>
+          <a:prstGeom prst="rect">
+            <a:avLst/>
+          </a:prstGeom>
+          <a:noFill/>
+          <a:ln/>
+        </p:spPr>
+        <p:txBody>
+          <a:bodyPr wrap="square" lIns="0" tIns="0" rIns="0" bIns="0" rtlCol="0" anchor="ctr"/>
+          <a:lstStyle/>
+          <a:p>
+            <a:pPr marL="0" indent="0">
+              <a:buNone/>
+            </a:pPr>
+            <a:r>
+              <a:rPr lang="en-US" sz="900" b="1" kern="0" spc="150" dirty="0">
+                <a:solidFill>
+                  <a:srgbClr val="800020"/>
+                </a:solidFill>
+                <a:latin typeface="Calibri" pitchFamily="34" charset="0"/>
+                <a:ea typeface="Calibri" pitchFamily="34" charset="-122"/>
+                <a:cs typeface="Calibri" pitchFamily="34" charset="-120"/>
+              </a:rPr>
+              <a:t>1. INTRODUCTION</a:t>
+            </a:r>
+            <a:endParaRPr lang="en-US" sz="900" dirty="0"/>
+          </a:p>
+        </p:txBody>
+      </p:sp>
+      <p:sp>
+        <p:nvSpPr>
+          <p:cNvPr id="3" name="Text 1"/>
+          <p:cNvSpPr/>
+          <p:nvPr/>
+        </p:nvSpPr>
+        <p:spPr>
+          <a:xfrm>
+            <a:off x="548640" y="438912"/>
+            <a:ext cx="8046720" cy="411480"/>
+          </a:xfrm>
+          <a:prstGeom prst="rect">
+            <a:avLst/>
+          </a:prstGeom>
+          <a:noFill/>
+          <a:ln/>
+        </p:spPr>
+        <p:txBody>
+          <a:bodyPr wrap="square" lIns="0" tIns="0" rIns="0" bIns="0" rtlCol="0" anchor="ctr"/>
+          <a:lstStyle/>
+          <a:p>
+            <a:r>
+              <a:rPr lang="en-US" sz="2300" b="1" dirty="0">
+                <a:solidFill>
+                  <a:srgbClr val="0F172A"/>
+                </a:solidFill>
+                <a:latin typeface="Century Schoolbook" pitchFamily="34" charset="0"/>
+                <a:ea typeface="Century Schoolbook" pitchFamily="34" charset="-122"/>
+                <a:cs typeface="Century Schoolbook" pitchFamily="34" charset="-120"/>
+              </a:rPr>
+              <a:t>Large Language Model (LLM)</a:t>
+            </a:r>
+            <a:endParaRPr lang="en-US" sz="2300" dirty="0"/>
+          </a:p>
+        </p:txBody>
+      </p:sp>
+      <p:sp>
+        <p:nvSpPr>
+          <p:cNvPr id="43" name="Text 40"/>
+          <p:cNvSpPr/>
+          <p:nvPr/>
+        </p:nvSpPr>
+        <p:spPr>
+          <a:xfrm>
+            <a:off x="548640" y="4736592"/>
+            <a:ext cx="6583680" cy="274320"/>
+          </a:xfrm>
+          <a:prstGeom prst="rect">
+            <a:avLst/>
+          </a:prstGeom>
+          <a:noFill/>
+          <a:ln/>
+        </p:spPr>
+        <p:txBody>
+          <a:bodyPr wrap="square" lIns="0" tIns="0" rIns="0" bIns="0" rtlCol="0" anchor="ctr"/>
+          <a:lstStyle/>
+          <a:p>
+            <a:pPr marL="0" indent="0" algn="l">
+              <a:buNone/>
+            </a:pPr>
+            <a:r>
+              <a:rPr lang="en-US" sz="850" dirty="0">
+                <a:solidFill>
+                  <a:srgbClr val="64748B"/>
+                </a:solidFill>
+                <a:latin typeface="Calibri" pitchFamily="34" charset="0"/>
+                <a:ea typeface="Calibri" pitchFamily="34" charset="-122"/>
+                <a:cs typeface="Calibri" pitchFamily="34" charset="-120"/>
+              </a:rPr>
+              <a:t>Large Language Models Cannot Self-Correct Reasoning Yet | ICLR 2024</a:t>
+            </a:r>
+            <a:endParaRPr lang="en-US" sz="850" dirty="0"/>
+          </a:p>
+        </p:txBody>
+      </p:sp>
+      <p:sp>
+        <p:nvSpPr>
+          <p:cNvPr id="44" name="Text 41"/>
+          <p:cNvSpPr/>
+          <p:nvPr/>
+        </p:nvSpPr>
+        <p:spPr>
+          <a:xfrm>
+            <a:off x="7315200" y="4736592"/>
+            <a:ext cx="1280160" cy="274320"/>
+          </a:xfrm>
+          <a:prstGeom prst="rect">
+            <a:avLst/>
+          </a:prstGeom>
+          <a:noFill/>
+          <a:ln/>
+        </p:spPr>
+        <p:txBody>
+          <a:bodyPr wrap="square" lIns="0" tIns="0" rIns="0" bIns="0" rtlCol="0" anchor="ctr"/>
+          <a:lstStyle/>
+          <a:p>
+            <a:pPr marL="0" indent="0" algn="r">
+              <a:buNone/>
+            </a:pPr>
+            <a:r>
+              <a:rPr lang="en-US" sz="850" b="1" dirty="0">
+                <a:solidFill>
+                  <a:srgbClr val="64748B"/>
+                </a:solidFill>
+                <a:latin typeface="Calibri" pitchFamily="34" charset="0"/>
+                <a:ea typeface="Calibri" pitchFamily="34" charset="-122"/>
+                <a:cs typeface="Calibri" pitchFamily="34" charset="-120"/>
+              </a:rPr>
+              <a:t>03/23</a:t>
+            </a:r>
+            <a:endParaRPr lang="en-US" sz="850" dirty="0"/>
+          </a:p>
+        </p:txBody>
+      </p:sp>
+      <p:sp>
+        <p:nvSpPr>
+          <p:cNvPr id="7" name="Google Shape;65;p4">
+            <a:extLst>
+              <a:ext uri="{FF2B5EF4-FFF2-40B4-BE49-F238E27FC236}">
+                <a16:creationId xmlns:a16="http://schemas.microsoft.com/office/drawing/2014/main" id="{1C1562E0-9F20-7B79-7F8C-89CB0723D7BA}"/>
+              </a:ext>
+            </a:extLst>
+          </p:cNvPr>
+          <p:cNvSpPr txBox="1"/>
+          <p:nvPr/>
+        </p:nvSpPr>
+        <p:spPr>
+          <a:xfrm>
+            <a:off x="1054550" y="1764866"/>
+            <a:ext cx="3474000" cy="217800"/>
+          </a:xfrm>
+          <a:prstGeom prst="rect">
+            <a:avLst/>
+          </a:prstGeom>
+          <a:noFill/>
+          <a:ln>
+            <a:noFill/>
+          </a:ln>
+        </p:spPr>
+        <p:txBody>
+          <a:bodyPr spcFirstLastPara="1" wrap="square" lIns="0" tIns="0" rIns="0" bIns="0" anchor="ctr" anchorCtr="0">
+            <a:noAutofit/>
+          </a:bodyPr>
+          <a:lstStyle/>
+          <a:p>
+            <a:pPr>
+              <a:buClr>
+                <a:srgbClr val="0F172A"/>
+              </a:buClr>
+              <a:buSzPts val="1400"/>
+            </a:pPr>
+            <a:r>
+              <a:rPr lang="en-US" sz="1050" b="1" dirty="0">
+                <a:solidFill>
+                  <a:srgbClr val="0F172A"/>
+                </a:solidFill>
+                <a:latin typeface="Calibri"/>
+                <a:ea typeface="Calibri"/>
+                <a:cs typeface="Calibri"/>
+                <a:sym typeface="Calibri"/>
+              </a:rPr>
+              <a:t>Next-Token Prediction</a:t>
+            </a:r>
+          </a:p>
+        </p:txBody>
+      </p:sp>
+      <p:sp>
+        <p:nvSpPr>
+          <p:cNvPr id="8" name="Google Shape;66;p4">
+            <a:extLst>
+              <a:ext uri="{FF2B5EF4-FFF2-40B4-BE49-F238E27FC236}">
+                <a16:creationId xmlns:a16="http://schemas.microsoft.com/office/drawing/2014/main" id="{F494EB6D-C71D-28CE-7EC5-A27229E70D78}"/>
+              </a:ext>
+            </a:extLst>
+          </p:cNvPr>
+          <p:cNvSpPr txBox="1"/>
+          <p:nvPr/>
+        </p:nvSpPr>
+        <p:spPr>
+          <a:xfrm>
+            <a:off x="1054550" y="1982503"/>
+            <a:ext cx="3474000" cy="326925"/>
+          </a:xfrm>
+          <a:prstGeom prst="rect">
+            <a:avLst/>
+          </a:prstGeom>
+          <a:noFill/>
+          <a:ln>
+            <a:noFill/>
+          </a:ln>
+        </p:spPr>
+        <p:txBody>
+          <a:bodyPr spcFirstLastPara="1" wrap="square" lIns="0" tIns="0" rIns="0" bIns="0" anchor="ctr" anchorCtr="0">
+            <a:noAutofit/>
+          </a:bodyPr>
+          <a:lstStyle/>
+          <a:p>
+            <a:pPr>
+              <a:lnSpc>
+                <a:spcPct val="110000"/>
+              </a:lnSpc>
+            </a:pPr>
+            <a:r>
+              <a:rPr lang="en-US" sz="1400" dirty="0">
+                <a:solidFill>
+                  <a:srgbClr val="334155"/>
+                </a:solidFill>
+                <a:latin typeface="Calibri" pitchFamily="34" charset="0"/>
+                <a:ea typeface="Calibri" pitchFamily="34" charset="-122"/>
+                <a:cs typeface="Calibri" pitchFamily="34" charset="-120"/>
+              </a:rPr>
+              <a:t>Predicts the next token, one at a time.</a:t>
+            </a:r>
+            <a:endParaRPr lang="en-US" sz="1400" dirty="0"/>
+          </a:p>
+        </p:txBody>
+      </p:sp>
+      <p:sp>
+        <p:nvSpPr>
+          <p:cNvPr id="12" name="Google Shape;70;p4">
+            <a:extLst>
+              <a:ext uri="{FF2B5EF4-FFF2-40B4-BE49-F238E27FC236}">
+                <a16:creationId xmlns:a16="http://schemas.microsoft.com/office/drawing/2014/main" id="{652381E2-0F3D-B8C8-E88E-49824DF9506B}"/>
+              </a:ext>
+            </a:extLst>
+          </p:cNvPr>
+          <p:cNvSpPr txBox="1"/>
+          <p:nvPr/>
+        </p:nvSpPr>
+        <p:spPr>
+          <a:xfrm>
+            <a:off x="1054550" y="2490323"/>
+            <a:ext cx="3474000" cy="217800"/>
+          </a:xfrm>
+          <a:prstGeom prst="rect">
+            <a:avLst/>
+          </a:prstGeom>
+          <a:noFill/>
+          <a:ln>
+            <a:noFill/>
+          </a:ln>
+        </p:spPr>
+        <p:txBody>
+          <a:bodyPr spcFirstLastPara="1" wrap="square" lIns="0" tIns="0" rIns="0" bIns="0" anchor="ctr" anchorCtr="0">
+            <a:noAutofit/>
+          </a:bodyPr>
+          <a:lstStyle/>
+          <a:p>
+            <a:pPr>
+              <a:buClr>
+                <a:srgbClr val="0F172A"/>
+              </a:buClr>
+              <a:buSzPts val="1400"/>
+            </a:pPr>
+            <a:r>
+              <a:rPr lang="en-US" sz="1050" b="1" dirty="0">
+                <a:solidFill>
+                  <a:srgbClr val="0F172A"/>
+                </a:solidFill>
+                <a:latin typeface="Calibri"/>
+                <a:ea typeface="Calibri"/>
+                <a:cs typeface="Calibri"/>
+                <a:sym typeface="Calibri"/>
+              </a:rPr>
+              <a:t>Pattern Learning</a:t>
+            </a:r>
+          </a:p>
+        </p:txBody>
+      </p:sp>
+      <p:sp>
+        <p:nvSpPr>
+          <p:cNvPr id="13" name="Google Shape;71;p4">
+            <a:extLst>
+              <a:ext uri="{FF2B5EF4-FFF2-40B4-BE49-F238E27FC236}">
+                <a16:creationId xmlns:a16="http://schemas.microsoft.com/office/drawing/2014/main" id="{CF766E6F-BB3A-D1C3-647F-9E77C9D6CD3E}"/>
+              </a:ext>
+            </a:extLst>
+          </p:cNvPr>
+          <p:cNvSpPr txBox="1"/>
+          <p:nvPr/>
+        </p:nvSpPr>
+        <p:spPr>
+          <a:xfrm>
+            <a:off x="1054550" y="2720660"/>
+            <a:ext cx="3474000" cy="398925"/>
+          </a:xfrm>
+          <a:prstGeom prst="rect">
+            <a:avLst/>
+          </a:prstGeom>
+          <a:noFill/>
+          <a:ln>
+            <a:noFill/>
+          </a:ln>
+        </p:spPr>
+        <p:txBody>
+          <a:bodyPr spcFirstLastPara="1" wrap="square" lIns="0" tIns="0" rIns="0" bIns="0" anchor="ctr" anchorCtr="0">
+            <a:noAutofit/>
+          </a:bodyPr>
+          <a:lstStyle/>
+          <a:p>
+            <a:pPr>
+              <a:lnSpc>
+                <a:spcPct val="110000"/>
+              </a:lnSpc>
+              <a:buClr>
+                <a:srgbClr val="334155"/>
+              </a:buClr>
+              <a:buSzPts val="1200"/>
+            </a:pPr>
+            <a:r>
+              <a:rPr lang="en-US" sz="1350" dirty="0">
+                <a:solidFill>
+                  <a:srgbClr val="334155"/>
+                </a:solidFill>
+                <a:latin typeface="Calibri"/>
+                <a:ea typeface="Calibri"/>
+                <a:cs typeface="Calibri"/>
+                <a:sym typeface="Calibri"/>
+              </a:rPr>
+              <a:t>Learns patterns and relationships from large amounts of text.</a:t>
+            </a:r>
+            <a:endParaRPr sz="1350" dirty="0">
+              <a:solidFill>
+                <a:schemeClr val="dk1"/>
+              </a:solidFill>
+              <a:latin typeface="Calibri"/>
+              <a:ea typeface="Calibri"/>
+              <a:cs typeface="Calibri"/>
+              <a:sym typeface="Calibri"/>
+            </a:endParaRPr>
+          </a:p>
+        </p:txBody>
+      </p:sp>
+      <p:sp>
+        <p:nvSpPr>
+          <p:cNvPr id="17" name="Google Shape;75;p4">
+            <a:extLst>
+              <a:ext uri="{FF2B5EF4-FFF2-40B4-BE49-F238E27FC236}">
+                <a16:creationId xmlns:a16="http://schemas.microsoft.com/office/drawing/2014/main" id="{14E4BFA5-FDBC-88C4-96B4-E576373C4B80}"/>
+              </a:ext>
+            </a:extLst>
+          </p:cNvPr>
+          <p:cNvSpPr txBox="1"/>
+          <p:nvPr/>
+        </p:nvSpPr>
+        <p:spPr>
+          <a:xfrm>
+            <a:off x="1054550" y="3215780"/>
+            <a:ext cx="3474000" cy="217800"/>
+          </a:xfrm>
+          <a:prstGeom prst="rect">
+            <a:avLst/>
+          </a:prstGeom>
+          <a:noFill/>
+          <a:ln>
+            <a:noFill/>
+          </a:ln>
+        </p:spPr>
+        <p:txBody>
+          <a:bodyPr spcFirstLastPara="1" wrap="square" lIns="0" tIns="0" rIns="0" bIns="0" anchor="ctr" anchorCtr="0">
+            <a:noAutofit/>
+          </a:bodyPr>
+          <a:lstStyle/>
+          <a:p>
+            <a:pPr>
+              <a:buClr>
+                <a:srgbClr val="0F172A"/>
+              </a:buClr>
+              <a:buSzPts val="1400"/>
+            </a:pPr>
+            <a:r>
+              <a:rPr lang="en-US" sz="1050" b="1" dirty="0"/>
+              <a:t>Text Generation</a:t>
+            </a:r>
+            <a:endParaRPr sz="1050" b="1" dirty="0">
+              <a:solidFill>
+                <a:schemeClr val="dk1"/>
+              </a:solidFill>
+              <a:latin typeface="Calibri"/>
+              <a:ea typeface="Calibri"/>
+              <a:cs typeface="Calibri"/>
+              <a:sym typeface="Calibri"/>
+            </a:endParaRPr>
+          </a:p>
+        </p:txBody>
+      </p:sp>
+      <p:sp>
+        <p:nvSpPr>
+          <p:cNvPr id="18" name="Google Shape;76;p4">
+            <a:extLst>
+              <a:ext uri="{FF2B5EF4-FFF2-40B4-BE49-F238E27FC236}">
+                <a16:creationId xmlns:a16="http://schemas.microsoft.com/office/drawing/2014/main" id="{A25C3CDB-F9B4-0D62-1EA8-602B4922EC3E}"/>
+              </a:ext>
+            </a:extLst>
+          </p:cNvPr>
+          <p:cNvSpPr txBox="1"/>
+          <p:nvPr/>
+        </p:nvSpPr>
+        <p:spPr>
+          <a:xfrm>
+            <a:off x="1054550" y="3433417"/>
+            <a:ext cx="3695250" cy="326925"/>
+          </a:xfrm>
+          <a:prstGeom prst="rect">
+            <a:avLst/>
+          </a:prstGeom>
+          <a:noFill/>
+          <a:ln>
+            <a:noFill/>
+          </a:ln>
+        </p:spPr>
+        <p:txBody>
+          <a:bodyPr spcFirstLastPara="1" wrap="square" lIns="0" tIns="0" rIns="0" bIns="0" anchor="ctr" anchorCtr="0">
+            <a:noAutofit/>
+          </a:bodyPr>
+          <a:lstStyle/>
+          <a:p>
+            <a:pPr>
+              <a:lnSpc>
+                <a:spcPct val="110000"/>
+              </a:lnSpc>
+              <a:buClr>
+                <a:srgbClr val="334155"/>
+              </a:buClr>
+              <a:buSzPts val="1200"/>
+            </a:pPr>
+            <a:r>
+              <a:rPr lang="en-US" sz="1350" dirty="0">
+                <a:solidFill>
+                  <a:srgbClr val="334155"/>
+                </a:solidFill>
+                <a:latin typeface="Calibri"/>
+                <a:ea typeface="Calibri"/>
+                <a:cs typeface="Calibri"/>
+                <a:sym typeface="Calibri"/>
+              </a:rPr>
+              <a:t>Generates human-like text based on the given input.</a:t>
+            </a:r>
+            <a:endParaRPr sz="1350" dirty="0">
+              <a:solidFill>
+                <a:schemeClr val="dk1"/>
+              </a:solidFill>
+              <a:latin typeface="Calibri"/>
+              <a:ea typeface="Calibri"/>
+              <a:cs typeface="Calibri"/>
+              <a:sym typeface="Calibri"/>
+            </a:endParaRPr>
+          </a:p>
+        </p:txBody>
+      </p:sp>
+      <p:pic>
+        <p:nvPicPr>
+          <p:cNvPr id="19" name="Google Shape;77;p4">
+            <a:extLst>
+              <a:ext uri="{FF2B5EF4-FFF2-40B4-BE49-F238E27FC236}">
+                <a16:creationId xmlns:a16="http://schemas.microsoft.com/office/drawing/2014/main" id="{25BC46BF-7A2E-3B1C-7778-CC13CEF67F27}"/>
+              </a:ext>
+            </a:extLst>
+          </p:cNvPr>
+          <p:cNvPicPr preferRelativeResize="0"/>
+          <p:nvPr/>
+        </p:nvPicPr>
+        <p:blipFill>
+          <a:blip r:embed="rId3"/>
+          <a:srcRect l="4219" r="3934"/>
+          <a:stretch>
+            <a:fillRect/>
+          </a:stretch>
+        </p:blipFill>
+        <p:spPr>
+          <a:xfrm>
+            <a:off x="5339700" y="1305420"/>
+            <a:ext cx="3324853" cy="2413334"/>
+          </a:xfrm>
+          <a:prstGeom prst="rect">
+            <a:avLst/>
+          </a:prstGeom>
+          <a:noFill/>
+          <a:ln>
+            <a:noFill/>
+          </a:ln>
+        </p:spPr>
+      </p:pic>
+      <p:sp>
+        <p:nvSpPr>
+          <p:cNvPr id="20" name="Google Shape;79;p4">
+            <a:extLst>
+              <a:ext uri="{FF2B5EF4-FFF2-40B4-BE49-F238E27FC236}">
+                <a16:creationId xmlns:a16="http://schemas.microsoft.com/office/drawing/2014/main" id="{B7644AAE-1312-A0E2-8AAC-9C51F96140DD}"/>
+              </a:ext>
+            </a:extLst>
+          </p:cNvPr>
+          <p:cNvSpPr txBox="1"/>
+          <p:nvPr/>
+        </p:nvSpPr>
+        <p:spPr>
+          <a:xfrm>
+            <a:off x="5265127" y="3596879"/>
+            <a:ext cx="3474001" cy="346226"/>
+          </a:xfrm>
+          <a:prstGeom prst="rect">
+            <a:avLst/>
+          </a:prstGeom>
+          <a:noFill/>
+          <a:ln>
+            <a:noFill/>
+          </a:ln>
+        </p:spPr>
+        <p:txBody>
+          <a:bodyPr spcFirstLastPara="1" wrap="square" lIns="68569" tIns="68569" rIns="68569" bIns="68569" anchor="t" anchorCtr="0">
+            <a:spAutoFit/>
+          </a:bodyPr>
+          <a:lstStyle/>
+          <a:p>
+            <a:pPr algn="ctr"/>
+            <a:r>
+              <a:rPr lang="en-US" sz="1350" dirty="0"/>
+              <a:t>Figure-1:Large Language Model</a:t>
+            </a:r>
+            <a:endParaRPr sz="1350" dirty="0"/>
+          </a:p>
+        </p:txBody>
+      </p:sp>
+      <p:sp>
+        <p:nvSpPr>
+          <p:cNvPr id="21" name="Google Shape;63;p4">
+            <a:extLst>
+              <a:ext uri="{FF2B5EF4-FFF2-40B4-BE49-F238E27FC236}">
+                <a16:creationId xmlns:a16="http://schemas.microsoft.com/office/drawing/2014/main" id="{37995195-4E81-770A-C1E9-27EC8868FB45}"/>
+              </a:ext>
+            </a:extLst>
+          </p:cNvPr>
+          <p:cNvSpPr/>
+          <p:nvPr/>
+        </p:nvSpPr>
+        <p:spPr>
+          <a:xfrm>
+            <a:off x="548640" y="1786630"/>
+            <a:ext cx="371025" cy="398925"/>
+          </a:xfrm>
+          <a:prstGeom prst="ellipse">
+            <a:avLst/>
+          </a:prstGeom>
+          <a:solidFill>
+            <a:srgbClr val="800020"/>
+          </a:solidFill>
+          <a:ln>
+            <a:noFill/>
+          </a:ln>
+        </p:spPr>
+        <p:txBody>
+          <a:bodyPr spcFirstLastPara="1" wrap="square" lIns="68569" tIns="68569" rIns="68569" bIns="68569" anchor="ctr" anchorCtr="0">
+            <a:noAutofit/>
+          </a:bodyPr>
+          <a:lstStyle/>
+          <a:p>
+            <a:endParaRPr sz="1350"/>
+          </a:p>
+        </p:txBody>
+      </p:sp>
+      <p:sp>
+        <p:nvSpPr>
+          <p:cNvPr id="22" name="Google Shape;64;p4">
+            <a:extLst>
+              <a:ext uri="{FF2B5EF4-FFF2-40B4-BE49-F238E27FC236}">
+                <a16:creationId xmlns:a16="http://schemas.microsoft.com/office/drawing/2014/main" id="{5B3CAB87-F3E5-86D7-D71B-D11938C172A7}"/>
+              </a:ext>
+            </a:extLst>
+          </p:cNvPr>
+          <p:cNvSpPr txBox="1"/>
+          <p:nvPr/>
+        </p:nvSpPr>
+        <p:spPr>
+          <a:xfrm>
+            <a:off x="548640" y="1786630"/>
+            <a:ext cx="371025" cy="398925"/>
+          </a:xfrm>
+          <a:prstGeom prst="rect">
+            <a:avLst/>
+          </a:prstGeom>
+          <a:noFill/>
+          <a:ln>
+            <a:noFill/>
+          </a:ln>
+        </p:spPr>
+        <p:txBody>
+          <a:bodyPr spcFirstLastPara="1" wrap="square" lIns="0" tIns="0" rIns="0" bIns="0" anchor="ctr" anchorCtr="0">
+            <a:noAutofit/>
+          </a:bodyPr>
+          <a:lstStyle/>
+          <a:p>
+            <a:pPr algn="ctr">
+              <a:buClr>
+                <a:srgbClr val="FFFFFF"/>
+              </a:buClr>
+              <a:buSzPts val="1600"/>
+            </a:pPr>
+            <a:r>
+              <a:rPr lang="en-US" sz="1200" b="1" dirty="0">
+                <a:solidFill>
+                  <a:srgbClr val="FFFFFF"/>
+                </a:solidFill>
+                <a:latin typeface="Century Schoolbook"/>
+                <a:ea typeface="Century Schoolbook"/>
+                <a:cs typeface="Century Schoolbook"/>
+                <a:sym typeface="Century Schoolbook"/>
+              </a:rPr>
+              <a:t>1</a:t>
+            </a:r>
+            <a:endParaRPr sz="1200" dirty="0">
+              <a:solidFill>
+                <a:schemeClr val="dk1"/>
+              </a:solidFill>
+              <a:latin typeface="Calibri"/>
+              <a:ea typeface="Calibri"/>
+              <a:cs typeface="Calibri"/>
+              <a:sym typeface="Calibri"/>
+            </a:endParaRPr>
+          </a:p>
+        </p:txBody>
+      </p:sp>
+      <p:cxnSp>
+        <p:nvCxnSpPr>
+          <p:cNvPr id="23" name="Google Shape;67;p4">
+            <a:extLst>
+              <a:ext uri="{FF2B5EF4-FFF2-40B4-BE49-F238E27FC236}">
+                <a16:creationId xmlns:a16="http://schemas.microsoft.com/office/drawing/2014/main" id="{BFFFB4EA-541B-9FB3-E220-28B6646E8166}"/>
+              </a:ext>
+            </a:extLst>
+          </p:cNvPr>
+          <p:cNvCxnSpPr/>
+          <p:nvPr/>
+        </p:nvCxnSpPr>
+        <p:spPr>
+          <a:xfrm>
+            <a:off x="734140" y="2185631"/>
+            <a:ext cx="0" cy="362475"/>
+          </a:xfrm>
+          <a:prstGeom prst="straightConnector1">
+            <a:avLst/>
+          </a:prstGeom>
+          <a:noFill/>
+          <a:ln w="19050" cap="flat" cmpd="sng">
+            <a:solidFill>
+              <a:srgbClr val="E2E8F0"/>
+            </a:solidFill>
+            <a:prstDash val="dash"/>
+            <a:round/>
+            <a:headEnd type="none" w="sm" len="sm"/>
+            <a:tailEnd type="none" w="sm" len="sm"/>
+          </a:ln>
+        </p:spPr>
+      </p:cxnSp>
+      <p:sp>
+        <p:nvSpPr>
+          <p:cNvPr id="24" name="Google Shape;68;p4">
+            <a:extLst>
+              <a:ext uri="{FF2B5EF4-FFF2-40B4-BE49-F238E27FC236}">
+                <a16:creationId xmlns:a16="http://schemas.microsoft.com/office/drawing/2014/main" id="{E83428CA-6DB2-E5AE-9AEC-9E3C499435EF}"/>
+              </a:ext>
+            </a:extLst>
+          </p:cNvPr>
+          <p:cNvSpPr/>
+          <p:nvPr/>
+        </p:nvSpPr>
+        <p:spPr>
+          <a:xfrm>
+            <a:off x="548640" y="2512087"/>
+            <a:ext cx="371025" cy="398925"/>
+          </a:xfrm>
+          <a:prstGeom prst="ellipse">
+            <a:avLst/>
+          </a:prstGeom>
+          <a:solidFill>
+            <a:srgbClr val="800020"/>
+          </a:solidFill>
+          <a:ln>
+            <a:noFill/>
+          </a:ln>
+        </p:spPr>
+        <p:txBody>
+          <a:bodyPr spcFirstLastPara="1" wrap="square" lIns="68569" tIns="68569" rIns="68569" bIns="68569" anchor="ctr" anchorCtr="0">
+            <a:noAutofit/>
+          </a:bodyPr>
+          <a:lstStyle/>
+          <a:p>
+            <a:endParaRPr sz="1350"/>
+          </a:p>
+        </p:txBody>
+      </p:sp>
+      <p:sp>
+        <p:nvSpPr>
+          <p:cNvPr id="25" name="Google Shape;69;p4">
+            <a:extLst>
+              <a:ext uri="{FF2B5EF4-FFF2-40B4-BE49-F238E27FC236}">
+                <a16:creationId xmlns:a16="http://schemas.microsoft.com/office/drawing/2014/main" id="{2F017E4A-BF3E-D54A-2A1A-22B76E447763}"/>
+              </a:ext>
+            </a:extLst>
+          </p:cNvPr>
+          <p:cNvSpPr txBox="1"/>
+          <p:nvPr/>
+        </p:nvSpPr>
+        <p:spPr>
+          <a:xfrm>
+            <a:off x="548640" y="2512011"/>
+            <a:ext cx="371025" cy="399001"/>
+          </a:xfrm>
+          <a:prstGeom prst="rect">
+            <a:avLst/>
+          </a:prstGeom>
+          <a:noFill/>
+          <a:ln>
+            <a:noFill/>
+          </a:ln>
+        </p:spPr>
+        <p:txBody>
+          <a:bodyPr spcFirstLastPara="1" wrap="square" lIns="0" tIns="0" rIns="0" bIns="0" anchor="ctr" anchorCtr="0">
+            <a:noAutofit/>
+          </a:bodyPr>
+          <a:lstStyle/>
+          <a:p>
+            <a:pPr algn="ctr">
+              <a:buClr>
+                <a:srgbClr val="FFFFFF"/>
+              </a:buClr>
+              <a:buSzPts val="1600"/>
+            </a:pPr>
+            <a:r>
+              <a:rPr lang="en-US" sz="1200" b="1">
+                <a:solidFill>
+                  <a:srgbClr val="FFFFFF"/>
+                </a:solidFill>
+                <a:latin typeface="Century Schoolbook"/>
+                <a:ea typeface="Century Schoolbook"/>
+                <a:cs typeface="Century Schoolbook"/>
+                <a:sym typeface="Century Schoolbook"/>
+              </a:rPr>
+              <a:t>2</a:t>
+            </a:r>
+            <a:endParaRPr sz="1200">
+              <a:solidFill>
+                <a:schemeClr val="dk1"/>
+              </a:solidFill>
+              <a:latin typeface="Calibri"/>
+              <a:ea typeface="Calibri"/>
+              <a:cs typeface="Calibri"/>
+              <a:sym typeface="Calibri"/>
+            </a:endParaRPr>
+          </a:p>
+        </p:txBody>
+      </p:sp>
+      <p:cxnSp>
+        <p:nvCxnSpPr>
+          <p:cNvPr id="26" name="Google Shape;72;p4">
+            <a:extLst>
+              <a:ext uri="{FF2B5EF4-FFF2-40B4-BE49-F238E27FC236}">
+                <a16:creationId xmlns:a16="http://schemas.microsoft.com/office/drawing/2014/main" id="{45ABDF1F-D8AE-6490-5FCA-35A45B7ECBFF}"/>
+              </a:ext>
+            </a:extLst>
+          </p:cNvPr>
+          <p:cNvCxnSpPr/>
+          <p:nvPr/>
+        </p:nvCxnSpPr>
+        <p:spPr>
+          <a:xfrm>
+            <a:off x="734140" y="2911088"/>
+            <a:ext cx="0" cy="362475"/>
+          </a:xfrm>
+          <a:prstGeom prst="straightConnector1">
+            <a:avLst/>
+          </a:prstGeom>
+          <a:noFill/>
+          <a:ln w="19050" cap="flat" cmpd="sng">
+            <a:solidFill>
+              <a:srgbClr val="E2E8F0"/>
+            </a:solidFill>
+            <a:prstDash val="dash"/>
+            <a:round/>
+            <a:headEnd type="none" w="sm" len="sm"/>
+            <a:tailEnd type="none" w="sm" len="sm"/>
+          </a:ln>
+        </p:spPr>
+      </p:cxnSp>
+      <p:sp>
+        <p:nvSpPr>
+          <p:cNvPr id="27" name="Google Shape;73;p4">
+            <a:extLst>
+              <a:ext uri="{FF2B5EF4-FFF2-40B4-BE49-F238E27FC236}">
+                <a16:creationId xmlns:a16="http://schemas.microsoft.com/office/drawing/2014/main" id="{041E1411-A791-527D-A4B7-DAE5E1D3F95C}"/>
+              </a:ext>
+            </a:extLst>
+          </p:cNvPr>
+          <p:cNvSpPr/>
+          <p:nvPr/>
+        </p:nvSpPr>
+        <p:spPr>
+          <a:xfrm>
+            <a:off x="548640" y="3237544"/>
+            <a:ext cx="371025" cy="398925"/>
+          </a:xfrm>
+          <a:prstGeom prst="ellipse">
+            <a:avLst/>
+          </a:prstGeom>
+          <a:solidFill>
+            <a:srgbClr val="800020"/>
+          </a:solidFill>
+          <a:ln>
+            <a:noFill/>
+          </a:ln>
+        </p:spPr>
+        <p:txBody>
+          <a:bodyPr spcFirstLastPara="1" wrap="square" lIns="68569" tIns="68569" rIns="68569" bIns="68569" anchor="ctr" anchorCtr="0">
+            <a:noAutofit/>
+          </a:bodyPr>
+          <a:lstStyle/>
+          <a:p>
+            <a:endParaRPr sz="1350"/>
+          </a:p>
+        </p:txBody>
+      </p:sp>
+      <p:sp>
+        <p:nvSpPr>
+          <p:cNvPr id="28" name="Google Shape;74;p4">
+            <a:extLst>
+              <a:ext uri="{FF2B5EF4-FFF2-40B4-BE49-F238E27FC236}">
+                <a16:creationId xmlns:a16="http://schemas.microsoft.com/office/drawing/2014/main" id="{C118A589-3331-E82D-4D92-544AF850A160}"/>
+              </a:ext>
+            </a:extLst>
+          </p:cNvPr>
+          <p:cNvSpPr txBox="1"/>
+          <p:nvPr/>
+        </p:nvSpPr>
+        <p:spPr>
+          <a:xfrm>
+            <a:off x="548640" y="3237392"/>
+            <a:ext cx="371025" cy="399077"/>
+          </a:xfrm>
+          <a:prstGeom prst="rect">
+            <a:avLst/>
+          </a:prstGeom>
+          <a:noFill/>
+          <a:ln>
+            <a:noFill/>
+          </a:ln>
+        </p:spPr>
+        <p:txBody>
+          <a:bodyPr spcFirstLastPara="1" wrap="square" lIns="0" tIns="0" rIns="0" bIns="0" anchor="ctr" anchorCtr="0">
+            <a:noAutofit/>
+          </a:bodyPr>
+          <a:lstStyle/>
+          <a:p>
+            <a:pPr algn="ctr">
+              <a:buClr>
+                <a:srgbClr val="FFFFFF"/>
+              </a:buClr>
+              <a:buSzPts val="1600"/>
+            </a:pPr>
+            <a:r>
+              <a:rPr lang="en-US" sz="1200" b="1" dirty="0">
+                <a:solidFill>
+                  <a:srgbClr val="FFFFFF"/>
+                </a:solidFill>
+                <a:latin typeface="Century Schoolbook"/>
+                <a:ea typeface="Century Schoolbook"/>
+                <a:cs typeface="Century Schoolbook"/>
+                <a:sym typeface="Century Schoolbook"/>
+              </a:rPr>
+              <a:t>3</a:t>
+            </a:r>
+            <a:endParaRPr sz="1200" dirty="0">
+              <a:solidFill>
+                <a:schemeClr val="dk1"/>
+              </a:solidFill>
+              <a:latin typeface="Calibri"/>
+              <a:ea typeface="Calibri"/>
+              <a:cs typeface="Calibri"/>
+              <a:sym typeface="Calibri"/>
+            </a:endParaRPr>
+          </a:p>
+        </p:txBody>
+      </p:sp>
+    </p:spTree>
+  </p:cSld>
+  <p:clrMapOvr>
+    <a:masterClrMapping/>
+  </p:clrMapOvr>
+</p:sld>
+</file>
+
+<file path=ppt/slides/slide4.xml><?xml version="1.0" encoding="utf-8"?>
+<p:sld xmlns:a="http://schemas.openxmlformats.org/drawingml/2006/main" xmlns:r="http://schemas.openxmlformats.org/officeDocument/2006/relationships" xmlns:p="http://schemas.openxmlformats.org/presentationml/2006/main">
   <p:cSld name="Slide 3">
     <p:bg>
       <p:bgPr>
@@ -26137,7 +27099,7 @@
                 <a:ea typeface="Calibri" pitchFamily="34" charset="-122"/>
                 <a:cs typeface="Calibri" pitchFamily="34" charset="-120"/>
               </a:rPr>
-              <a:t>03/24</a:t>
+              <a:t>04/23</a:t>
             </a:r>
             <a:endParaRPr lang="en-US" sz="850" dirty="0"/>
           </a:p>
@@ -26240,7 +27202,7 @@
             <a:avLst/>
           </a:prstGeom>
           <a:solidFill>
-            <a:srgbClr val="0F172A"/>
+            <a:srgbClr val="800020"/>
           </a:solidFill>
           <a:ln>
             <a:noFill/>
@@ -26294,7 +27256,7 @@
               <a:buSzPts val="1600"/>
             </a:pPr>
             <a:r>
-              <a:rPr lang="en-US" sz="1200" b="1">
+              <a:rPr lang="en-US" sz="1200" b="1" dirty="0">
                 <a:solidFill>
                   <a:srgbClr val="FFFFFF"/>
                 </a:solidFill>
@@ -26305,7 +27267,7 @@
               </a:rPr>
               <a:t>1</a:t>
             </a:r>
-            <a:endParaRPr sz="1200">
+            <a:endParaRPr sz="1200" dirty="0">
               <a:solidFill>
                 <a:schemeClr val="dk1"/>
               </a:solidFill>
@@ -26495,7 +27457,7 @@
             <a:avLst/>
           </a:prstGeom>
           <a:solidFill>
-            <a:srgbClr val="0F172A"/>
+            <a:srgbClr val="800020"/>
           </a:solidFill>
           <a:ln>
             <a:noFill/>
@@ -26525,8 +27487,8 @@
         </p:nvSpPr>
         <p:spPr>
           <a:xfrm>
-            <a:off x="548640" y="2512087"/>
-            <a:ext cx="371025" cy="398925"/>
+            <a:off x="548640" y="2512011"/>
+            <a:ext cx="371025" cy="399001"/>
           </a:xfrm>
           <a:prstGeom prst="rect">
             <a:avLst/>
@@ -26648,7 +27610,7 @@
         <p:spPr>
           <a:xfrm>
             <a:off x="1054550" y="2707960"/>
-            <a:ext cx="3474000" cy="326925"/>
+            <a:ext cx="3474000" cy="398925"/>
           </a:xfrm>
           <a:prstGeom prst="rect">
             <a:avLst/>
@@ -26750,7 +27712,7 @@
             <a:avLst/>
           </a:prstGeom>
           <a:solidFill>
-            <a:srgbClr val="0F172A"/>
+            <a:srgbClr val="800020"/>
           </a:solidFill>
           <a:ln>
             <a:noFill/>
@@ -26780,8 +27742,8 @@
         </p:nvSpPr>
         <p:spPr>
           <a:xfrm>
-            <a:off x="548640" y="3237544"/>
-            <a:ext cx="371025" cy="398925"/>
+            <a:off x="548640" y="3237392"/>
+            <a:ext cx="371025" cy="399077"/>
           </a:xfrm>
           <a:prstGeom prst="rect">
             <a:avLst/>
@@ -26804,7 +27766,7 @@
               <a:buSzPts val="1600"/>
             </a:pPr>
             <a:r>
-              <a:rPr lang="en-US" sz="1200" b="1">
+              <a:rPr lang="en-US" sz="1200" b="1" dirty="0">
                 <a:solidFill>
                   <a:srgbClr val="FFFFFF"/>
                 </a:solidFill>
@@ -26815,7 +27777,7 @@
               </a:rPr>
               <a:t>3</a:t>
             </a:r>
-            <a:endParaRPr sz="1200">
+            <a:endParaRPr sz="1200" dirty="0">
               <a:solidFill>
                 <a:schemeClr val="dk1"/>
               </a:solidFill>
@@ -27021,896 +27983,9 @@
             <a:pPr algn="ctr"/>
             <a:r>
               <a:rPr lang="en-US" sz="1350" dirty="0"/>
-              <a:t>Figure-1:Large Language Model Self correction procedure</a:t>
+              <a:t>Figure-2: Large Language Model Self correction procedure</a:t>
             </a:r>
             <a:endParaRPr sz="1350" dirty="0"/>
-          </a:p>
-        </p:txBody>
-      </p:sp>
-    </p:spTree>
-  </p:cSld>
-  <p:clrMapOvr>
-    <a:masterClrMapping/>
-  </p:clrMapOvr>
-</p:sld>
-</file>
-
-<file path=ppt/slides/slide4.xml><?xml version="1.0" encoding="utf-8"?>
-<p:sld xmlns:a="http://schemas.openxmlformats.org/drawingml/2006/main" xmlns:r="http://schemas.openxmlformats.org/officeDocument/2006/relationships" xmlns:p="http://schemas.openxmlformats.org/presentationml/2006/main">
-  <p:cSld name="Slide 4">
-    <p:bg>
-      <p:bgPr>
-        <a:solidFill>
-          <a:srgbClr val="FFFFFF"/>
-        </a:solidFill>
-        <a:effectLst/>
-      </p:bgPr>
-    </p:bg>
-    <p:spTree>
-      <p:nvGrpSpPr>
-        <p:cNvPr id="1" name=""/>
-        <p:cNvGrpSpPr/>
-        <p:nvPr/>
-      </p:nvGrpSpPr>
-      <p:grpSpPr>
-        <a:xfrm>
-          <a:off x="0" y="0"/>
-          <a:ext cx="0" cy="0"/>
-          <a:chOff x="0" y="0"/>
-          <a:chExt cx="0" cy="0"/>
-        </a:xfrm>
-      </p:grpSpPr>
-      <p:sp>
-        <p:nvSpPr>
-          <p:cNvPr id="2" name="Text 0"/>
-          <p:cNvSpPr/>
-          <p:nvPr/>
-        </p:nvSpPr>
-        <p:spPr>
-          <a:xfrm>
-            <a:off x="548640" y="201168"/>
-            <a:ext cx="8046720" cy="228600"/>
-          </a:xfrm>
-          <a:prstGeom prst="rect">
-            <a:avLst/>
-          </a:prstGeom>
-          <a:noFill/>
-          <a:ln/>
-        </p:spPr>
-        <p:txBody>
-          <a:bodyPr wrap="square" lIns="0" tIns="0" rIns="0" bIns="0" rtlCol="0" anchor="ctr"/>
-          <a:lstStyle/>
-          <a:p>
-            <a:pPr marL="0" indent="0">
-              <a:buNone/>
-            </a:pPr>
-            <a:r>
-              <a:rPr lang="en-US" sz="900" b="1" kern="0" spc="150" dirty="0">
-                <a:solidFill>
-                  <a:srgbClr val="800020"/>
-                </a:solidFill>
-                <a:latin typeface="Calibri" pitchFamily="34" charset="0"/>
-                <a:ea typeface="Calibri" pitchFamily="34" charset="-122"/>
-                <a:cs typeface="Calibri" pitchFamily="34" charset="-120"/>
-              </a:rPr>
-              <a:t>1. INTRODUCTION</a:t>
-            </a:r>
-            <a:endParaRPr lang="en-US" sz="900" dirty="0"/>
-          </a:p>
-        </p:txBody>
-      </p:sp>
-      <p:sp>
-        <p:nvSpPr>
-          <p:cNvPr id="3" name="Text 1"/>
-          <p:cNvSpPr/>
-          <p:nvPr/>
-        </p:nvSpPr>
-        <p:spPr>
-          <a:xfrm>
-            <a:off x="548640" y="438912"/>
-            <a:ext cx="8046720" cy="411480"/>
-          </a:xfrm>
-          <a:prstGeom prst="rect">
-            <a:avLst/>
-          </a:prstGeom>
-          <a:noFill/>
-          <a:ln/>
-        </p:spPr>
-        <p:txBody>
-          <a:bodyPr wrap="square" lIns="0" tIns="0" rIns="0" bIns="0" rtlCol="0" anchor="ctr"/>
-          <a:lstStyle/>
-          <a:p>
-            <a:r>
-              <a:rPr lang="en-US" sz="2300" b="1" dirty="0">
-                <a:solidFill>
-                  <a:srgbClr val="0F172A"/>
-                </a:solidFill>
-                <a:latin typeface="Century Schoolbook" pitchFamily="34" charset="0"/>
-                <a:ea typeface="Century Schoolbook" pitchFamily="34" charset="-122"/>
-                <a:cs typeface="Century Schoolbook" pitchFamily="34" charset="-120"/>
-              </a:rPr>
-              <a:t>Why Reasoning Accuracy Matters</a:t>
-            </a:r>
-            <a:endParaRPr lang="en-US" sz="2300" dirty="0"/>
-          </a:p>
-        </p:txBody>
-      </p:sp>
-      <p:sp>
-        <p:nvSpPr>
-          <p:cNvPr id="4" name="Text 2"/>
-          <p:cNvSpPr/>
-          <p:nvPr/>
-        </p:nvSpPr>
-        <p:spPr>
-          <a:xfrm>
-            <a:off x="548640" y="868680"/>
-            <a:ext cx="8046720" cy="228600"/>
-          </a:xfrm>
-          <a:prstGeom prst="rect">
-            <a:avLst/>
-          </a:prstGeom>
-          <a:noFill/>
-          <a:ln/>
-        </p:spPr>
-        <p:txBody>
-          <a:bodyPr wrap="square" lIns="0" tIns="0" rIns="0" bIns="0" rtlCol="0" anchor="ctr"/>
-          <a:lstStyle/>
-          <a:p>
-            <a:pPr marL="0" indent="0">
-              <a:buNone/>
-            </a:pPr>
-            <a:r>
-              <a:rPr lang="en-US" sz="1100" dirty="0">
-                <a:solidFill>
-                  <a:srgbClr val="64748B"/>
-                </a:solidFill>
-                <a:latin typeface="Calibri" pitchFamily="34" charset="0"/>
-                <a:ea typeface="Calibri" pitchFamily="34" charset="-122"/>
-                <a:cs typeface="Calibri" pitchFamily="34" charset="-120"/>
-              </a:rPr>
-              <a:t>LLMs are increasingly trusted with tasks where a wrong reasoning step means a wrong real-world decision.</a:t>
-            </a:r>
-          </a:p>
-        </p:txBody>
-      </p:sp>
-      <p:sp>
-        <p:nvSpPr>
-          <p:cNvPr id="43" name="Text 40"/>
-          <p:cNvSpPr/>
-          <p:nvPr/>
-        </p:nvSpPr>
-        <p:spPr>
-          <a:xfrm>
-            <a:off x="548640" y="4736592"/>
-            <a:ext cx="6583680" cy="274320"/>
-          </a:xfrm>
-          <a:prstGeom prst="rect">
-            <a:avLst/>
-          </a:prstGeom>
-          <a:noFill/>
-          <a:ln/>
-        </p:spPr>
-        <p:txBody>
-          <a:bodyPr wrap="square" lIns="0" tIns="0" rIns="0" bIns="0" rtlCol="0" anchor="ctr"/>
-          <a:lstStyle/>
-          <a:p>
-            <a:pPr marL="0" indent="0" algn="l">
-              <a:buNone/>
-            </a:pPr>
-            <a:r>
-              <a:rPr lang="en-US" sz="850" dirty="0">
-                <a:solidFill>
-                  <a:srgbClr val="64748B"/>
-                </a:solidFill>
-                <a:latin typeface="Calibri" pitchFamily="34" charset="0"/>
-                <a:ea typeface="Calibri" pitchFamily="34" charset="-122"/>
-                <a:cs typeface="Calibri" pitchFamily="34" charset="-120"/>
-              </a:rPr>
-              <a:t>Large Language Models Cannot Self-Correct Reasoning Yet | ICLR 2024</a:t>
-            </a:r>
-            <a:endParaRPr lang="en-US" sz="850" dirty="0"/>
-          </a:p>
-        </p:txBody>
-      </p:sp>
-      <p:sp>
-        <p:nvSpPr>
-          <p:cNvPr id="44" name="Text 41"/>
-          <p:cNvSpPr/>
-          <p:nvPr/>
-        </p:nvSpPr>
-        <p:spPr>
-          <a:xfrm>
-            <a:off x="7315200" y="4736592"/>
-            <a:ext cx="1280160" cy="274320"/>
-          </a:xfrm>
-          <a:prstGeom prst="rect">
-            <a:avLst/>
-          </a:prstGeom>
-          <a:noFill/>
-          <a:ln/>
-        </p:spPr>
-        <p:txBody>
-          <a:bodyPr wrap="square" lIns="0" tIns="0" rIns="0" bIns="0" rtlCol="0" anchor="ctr"/>
-          <a:lstStyle/>
-          <a:p>
-            <a:pPr marL="0" indent="0" algn="r">
-              <a:buNone/>
-            </a:pPr>
-            <a:r>
-              <a:rPr lang="en-US" sz="850" b="1" dirty="0">
-                <a:solidFill>
-                  <a:srgbClr val="64748B"/>
-                </a:solidFill>
-                <a:latin typeface="Calibri" pitchFamily="34" charset="0"/>
-                <a:ea typeface="Calibri" pitchFamily="34" charset="-122"/>
-                <a:cs typeface="Calibri" pitchFamily="34" charset="-120"/>
-              </a:rPr>
-              <a:t>04/24</a:t>
-            </a:r>
-            <a:endParaRPr lang="en-US" sz="850" dirty="0"/>
-          </a:p>
-        </p:txBody>
-      </p:sp>
-      <p:sp>
-        <p:nvSpPr>
-          <p:cNvPr id="42" name="Google Shape;88;p5">
-            <a:extLst>
-              <a:ext uri="{FF2B5EF4-FFF2-40B4-BE49-F238E27FC236}">
-                <a16:creationId xmlns:a16="http://schemas.microsoft.com/office/drawing/2014/main" id="{88A250EB-76AF-8235-9767-528D01663A86}"/>
-              </a:ext>
-            </a:extLst>
-          </p:cNvPr>
-          <p:cNvSpPr/>
-          <p:nvPr/>
-        </p:nvSpPr>
-        <p:spPr>
-          <a:xfrm>
-            <a:off x="548640" y="1611629"/>
-            <a:ext cx="2503170" cy="1899387"/>
-          </a:xfrm>
-          <a:prstGeom prst="rect">
-            <a:avLst/>
-          </a:prstGeom>
-          <a:solidFill>
-            <a:srgbClr val="FFFFFF"/>
-          </a:solidFill>
-          <a:ln w="12700" cap="flat" cmpd="sng">
-            <a:solidFill>
-              <a:srgbClr val="E2E8F0"/>
-            </a:solidFill>
-            <a:prstDash val="solid"/>
-            <a:round/>
-            <a:headEnd type="none" w="sm" len="sm"/>
-            <a:tailEnd type="none" w="sm" len="sm"/>
-          </a:ln>
-        </p:spPr>
-        <p:txBody>
-          <a:bodyPr spcFirstLastPara="1" wrap="square" lIns="68569" tIns="68569" rIns="68569" bIns="68569" anchor="ctr" anchorCtr="0">
-            <a:noAutofit/>
-          </a:bodyPr>
-          <a:lstStyle/>
-          <a:p>
-            <a:endParaRPr sz="1350"/>
-          </a:p>
-        </p:txBody>
-      </p:sp>
-      <p:sp>
-        <p:nvSpPr>
-          <p:cNvPr id="45" name="Google Shape;89;p5">
-            <a:extLst>
-              <a:ext uri="{FF2B5EF4-FFF2-40B4-BE49-F238E27FC236}">
-                <a16:creationId xmlns:a16="http://schemas.microsoft.com/office/drawing/2014/main" id="{18678728-E882-C3D8-3B75-F1C877B9B079}"/>
-              </a:ext>
-            </a:extLst>
-          </p:cNvPr>
-          <p:cNvSpPr/>
-          <p:nvPr/>
-        </p:nvSpPr>
-        <p:spPr>
-          <a:xfrm>
-            <a:off x="754380" y="1817370"/>
-            <a:ext cx="96012" cy="96012"/>
-          </a:xfrm>
-          <a:prstGeom prst="ellipse">
-            <a:avLst/>
-          </a:prstGeom>
-          <a:solidFill>
-            <a:srgbClr val="980000"/>
-          </a:solidFill>
-          <a:ln>
-            <a:noFill/>
-          </a:ln>
-        </p:spPr>
-        <p:txBody>
-          <a:bodyPr spcFirstLastPara="1" wrap="square" lIns="68569" tIns="68569" rIns="68569" bIns="68569" anchor="ctr" anchorCtr="0">
-            <a:noAutofit/>
-          </a:bodyPr>
-          <a:lstStyle/>
-          <a:p>
-            <a:endParaRPr sz="1350"/>
-          </a:p>
-        </p:txBody>
-      </p:sp>
-      <p:sp>
-        <p:nvSpPr>
-          <p:cNvPr id="46" name="Google Shape;90;p5">
-            <a:extLst>
-              <a:ext uri="{FF2B5EF4-FFF2-40B4-BE49-F238E27FC236}">
-                <a16:creationId xmlns:a16="http://schemas.microsoft.com/office/drawing/2014/main" id="{D66D0F2E-630D-EF2E-3C6B-524C6A7DFFC7}"/>
-              </a:ext>
-            </a:extLst>
-          </p:cNvPr>
-          <p:cNvSpPr txBox="1"/>
-          <p:nvPr/>
-        </p:nvSpPr>
-        <p:spPr>
-          <a:xfrm>
-            <a:off x="946404" y="1748790"/>
-            <a:ext cx="1885950" cy="240030"/>
-          </a:xfrm>
-          <a:prstGeom prst="rect">
-            <a:avLst/>
-          </a:prstGeom>
-          <a:noFill/>
-          <a:ln>
-            <a:noFill/>
-          </a:ln>
-        </p:spPr>
-        <p:txBody>
-          <a:bodyPr spcFirstLastPara="1" wrap="square" lIns="0" tIns="0" rIns="0" bIns="0" anchor="ctr" anchorCtr="0">
-            <a:noAutofit/>
-          </a:bodyPr>
-          <a:lstStyle/>
-          <a:p>
-            <a:pPr>
-              <a:buClr>
-                <a:srgbClr val="0F172A"/>
-              </a:buClr>
-              <a:buSzPts val="1600"/>
-            </a:pPr>
-            <a:r>
-              <a:rPr lang="en-US" sz="1200" b="1">
-                <a:solidFill>
-                  <a:srgbClr val="0F172A"/>
-                </a:solidFill>
-                <a:latin typeface="Century Schoolbook"/>
-                <a:ea typeface="Century Schoolbook"/>
-                <a:cs typeface="Century Schoolbook"/>
-                <a:sym typeface="Century Schoolbook"/>
-              </a:rPr>
-              <a:t>Math and logic</a:t>
-            </a:r>
-            <a:endParaRPr sz="1200">
-              <a:solidFill>
-                <a:schemeClr val="dk1"/>
-              </a:solidFill>
-              <a:latin typeface="Calibri"/>
-              <a:ea typeface="Calibri"/>
-              <a:cs typeface="Calibri"/>
-              <a:sym typeface="Calibri"/>
-            </a:endParaRPr>
-          </a:p>
-        </p:txBody>
-      </p:sp>
-      <p:sp>
-        <p:nvSpPr>
-          <p:cNvPr id="47" name="Google Shape;91;p5">
-            <a:extLst>
-              <a:ext uri="{FF2B5EF4-FFF2-40B4-BE49-F238E27FC236}">
-                <a16:creationId xmlns:a16="http://schemas.microsoft.com/office/drawing/2014/main" id="{0F59FFEF-7D5E-5BBC-A03D-9B04A7345F90}"/>
-              </a:ext>
-            </a:extLst>
-          </p:cNvPr>
-          <p:cNvSpPr txBox="1"/>
-          <p:nvPr/>
-        </p:nvSpPr>
-        <p:spPr>
-          <a:xfrm>
-            <a:off x="754425" y="2164546"/>
-            <a:ext cx="2091600" cy="1159298"/>
-          </a:xfrm>
-          <a:prstGeom prst="rect">
-            <a:avLst/>
-          </a:prstGeom>
-          <a:noFill/>
-          <a:ln>
-            <a:noFill/>
-          </a:ln>
-        </p:spPr>
-        <p:txBody>
-          <a:bodyPr spcFirstLastPara="1" wrap="square" lIns="0" tIns="0" rIns="0" bIns="0" anchor="ctr" anchorCtr="0">
-            <a:noAutofit/>
-          </a:bodyPr>
-          <a:lstStyle/>
-          <a:p>
-            <a:pPr>
-              <a:lnSpc>
-                <a:spcPct val="125000"/>
-              </a:lnSpc>
-              <a:buClr>
-                <a:srgbClr val="334155"/>
-              </a:buClr>
-              <a:buSzPts val="1250"/>
-            </a:pPr>
-            <a:r>
-              <a:rPr lang="en-US" sz="1350" dirty="0">
-                <a:solidFill>
-                  <a:srgbClr val="334155"/>
-                </a:solidFill>
-                <a:latin typeface="Calibri"/>
-                <a:ea typeface="Calibri"/>
-                <a:cs typeface="Calibri"/>
-                <a:sym typeface="Calibri"/>
-              </a:rPr>
-              <a:t>Grade-school word problems and multi-step arithmetic (GSM8K) require every intermediate step to be right, not just the final number.</a:t>
-            </a:r>
-            <a:endParaRPr sz="1350" dirty="0">
-              <a:solidFill>
-                <a:schemeClr val="dk1"/>
-              </a:solidFill>
-              <a:latin typeface="Calibri"/>
-              <a:ea typeface="Calibri"/>
-              <a:cs typeface="Calibri"/>
-              <a:sym typeface="Calibri"/>
-            </a:endParaRPr>
-          </a:p>
-        </p:txBody>
-      </p:sp>
-      <p:sp>
-        <p:nvSpPr>
-          <p:cNvPr id="48" name="Google Shape;92;p5">
-            <a:extLst>
-              <a:ext uri="{FF2B5EF4-FFF2-40B4-BE49-F238E27FC236}">
-                <a16:creationId xmlns:a16="http://schemas.microsoft.com/office/drawing/2014/main" id="{6998D835-8641-E4DF-DC18-C92E89949E09}"/>
-              </a:ext>
-            </a:extLst>
-          </p:cNvPr>
-          <p:cNvSpPr/>
-          <p:nvPr/>
-        </p:nvSpPr>
-        <p:spPr>
-          <a:xfrm>
-            <a:off x="3291840" y="1611630"/>
-            <a:ext cx="2503170" cy="1899386"/>
-          </a:xfrm>
-          <a:prstGeom prst="rect">
-            <a:avLst/>
-          </a:prstGeom>
-          <a:solidFill>
-            <a:srgbClr val="FFFFFF"/>
-          </a:solidFill>
-          <a:ln w="12700" cap="flat" cmpd="sng">
-            <a:solidFill>
-              <a:srgbClr val="E2E8F0"/>
-            </a:solidFill>
-            <a:prstDash val="solid"/>
-            <a:round/>
-            <a:headEnd type="none" w="sm" len="sm"/>
-            <a:tailEnd type="none" w="sm" len="sm"/>
-          </a:ln>
-        </p:spPr>
-        <p:txBody>
-          <a:bodyPr spcFirstLastPara="1" wrap="square" lIns="68569" tIns="68569" rIns="68569" bIns="68569" anchor="ctr" anchorCtr="0">
-            <a:noAutofit/>
-          </a:bodyPr>
-          <a:lstStyle/>
-          <a:p>
-            <a:endParaRPr sz="1350"/>
-          </a:p>
-        </p:txBody>
-      </p:sp>
-      <p:sp>
-        <p:nvSpPr>
-          <p:cNvPr id="49" name="Google Shape;93;p5">
-            <a:extLst>
-              <a:ext uri="{FF2B5EF4-FFF2-40B4-BE49-F238E27FC236}">
-                <a16:creationId xmlns:a16="http://schemas.microsoft.com/office/drawing/2014/main" id="{6E5F21C2-803D-210D-0059-5C42FBAC8B99}"/>
-              </a:ext>
-            </a:extLst>
-          </p:cNvPr>
-          <p:cNvSpPr/>
-          <p:nvPr/>
-        </p:nvSpPr>
-        <p:spPr>
-          <a:xfrm>
-            <a:off x="3497580" y="1817370"/>
-            <a:ext cx="96012" cy="96012"/>
-          </a:xfrm>
-          <a:prstGeom prst="ellipse">
-            <a:avLst/>
-          </a:prstGeom>
-          <a:solidFill>
-            <a:srgbClr val="980000"/>
-          </a:solidFill>
-          <a:ln>
-            <a:noFill/>
-          </a:ln>
-        </p:spPr>
-        <p:txBody>
-          <a:bodyPr spcFirstLastPara="1" wrap="square" lIns="68569" tIns="68569" rIns="68569" bIns="68569" anchor="ctr" anchorCtr="0">
-            <a:noAutofit/>
-          </a:bodyPr>
-          <a:lstStyle/>
-          <a:p>
-            <a:endParaRPr sz="1350"/>
-          </a:p>
-        </p:txBody>
-      </p:sp>
-      <p:sp>
-        <p:nvSpPr>
-          <p:cNvPr id="50" name="Google Shape;94;p5">
-            <a:extLst>
-              <a:ext uri="{FF2B5EF4-FFF2-40B4-BE49-F238E27FC236}">
-                <a16:creationId xmlns:a16="http://schemas.microsoft.com/office/drawing/2014/main" id="{7207F9D8-FC75-A256-EF2D-06EAAEBEE2D2}"/>
-              </a:ext>
-            </a:extLst>
-          </p:cNvPr>
-          <p:cNvSpPr txBox="1"/>
-          <p:nvPr/>
-        </p:nvSpPr>
-        <p:spPr>
-          <a:xfrm>
-            <a:off x="3689603" y="1748790"/>
-            <a:ext cx="2020161" cy="240030"/>
-          </a:xfrm>
-          <a:prstGeom prst="rect">
-            <a:avLst/>
-          </a:prstGeom>
-          <a:noFill/>
-          <a:ln>
-            <a:noFill/>
-          </a:ln>
-        </p:spPr>
-        <p:txBody>
-          <a:bodyPr spcFirstLastPara="1" wrap="square" lIns="0" tIns="0" rIns="0" bIns="0" anchor="ctr" anchorCtr="0">
-            <a:noAutofit/>
-          </a:bodyPr>
-          <a:lstStyle/>
-          <a:p>
-            <a:pPr>
-              <a:buClr>
-                <a:srgbClr val="0F172A"/>
-              </a:buClr>
-              <a:buSzPts val="1600"/>
-            </a:pPr>
-            <a:r>
-              <a:rPr lang="en-US" sz="1200" b="1" dirty="0">
-                <a:solidFill>
-                  <a:srgbClr val="0F172A"/>
-                </a:solidFill>
-                <a:latin typeface="Century Schoolbook"/>
-                <a:ea typeface="Century Schoolbook"/>
-                <a:cs typeface="Century Schoolbook"/>
-                <a:sym typeface="Century Schoolbook"/>
-              </a:rPr>
-              <a:t>Commonsense Judgment</a:t>
-            </a:r>
-            <a:endParaRPr sz="1200" dirty="0">
-              <a:solidFill>
-                <a:schemeClr val="dk1"/>
-              </a:solidFill>
-              <a:latin typeface="Calibri"/>
-              <a:ea typeface="Calibri"/>
-              <a:cs typeface="Calibri"/>
-              <a:sym typeface="Calibri"/>
-            </a:endParaRPr>
-          </a:p>
-        </p:txBody>
-      </p:sp>
-      <p:sp>
-        <p:nvSpPr>
-          <p:cNvPr id="51" name="Google Shape;95;p5">
-            <a:extLst>
-              <a:ext uri="{FF2B5EF4-FFF2-40B4-BE49-F238E27FC236}">
-                <a16:creationId xmlns:a16="http://schemas.microsoft.com/office/drawing/2014/main" id="{6EC031D9-93C4-2F5D-5EA1-FD31FD7E615B}"/>
-              </a:ext>
-            </a:extLst>
-          </p:cNvPr>
-          <p:cNvSpPr txBox="1"/>
-          <p:nvPr/>
-        </p:nvSpPr>
-        <p:spPr>
-          <a:xfrm>
-            <a:off x="3446140" y="2119123"/>
-            <a:ext cx="2091600" cy="1259272"/>
-          </a:xfrm>
-          <a:prstGeom prst="rect">
-            <a:avLst/>
-          </a:prstGeom>
-          <a:noFill/>
-          <a:ln>
-            <a:noFill/>
-          </a:ln>
-        </p:spPr>
-        <p:txBody>
-          <a:bodyPr spcFirstLastPara="1" wrap="square" lIns="0" tIns="0" rIns="0" bIns="0" anchor="ctr" anchorCtr="0">
-            <a:noAutofit/>
-          </a:bodyPr>
-          <a:lstStyle/>
-          <a:p>
-            <a:pPr>
-              <a:lnSpc>
-                <a:spcPct val="125000"/>
-              </a:lnSpc>
-              <a:buClr>
-                <a:srgbClr val="334155"/>
-              </a:buClr>
-              <a:buSzPts val="1250"/>
-            </a:pPr>
-            <a:r>
-              <a:rPr lang="en-US" sz="1350" dirty="0">
-                <a:solidFill>
-                  <a:srgbClr val="334155"/>
-                </a:solidFill>
-                <a:latin typeface="Calibri"/>
-                <a:ea typeface="Calibri"/>
-                <a:cs typeface="Calibri"/>
-                <a:sym typeface="Calibri"/>
-              </a:rPr>
-              <a:t>Everyday reasoning tasks (</a:t>
-            </a:r>
-            <a:r>
-              <a:rPr lang="en-US" sz="1350" dirty="0" err="1">
-                <a:solidFill>
-                  <a:srgbClr val="334155"/>
-                </a:solidFill>
-                <a:latin typeface="Calibri"/>
-                <a:ea typeface="Calibri"/>
-                <a:cs typeface="Calibri"/>
-                <a:sym typeface="Calibri"/>
-              </a:rPr>
-              <a:t>CommonSenseQA</a:t>
-            </a:r>
-            <a:r>
-              <a:rPr lang="en-US" sz="1350" dirty="0">
-                <a:solidFill>
-                  <a:srgbClr val="334155"/>
-                </a:solidFill>
-                <a:latin typeface="Calibri"/>
-                <a:ea typeface="Calibri"/>
-                <a:cs typeface="Calibri"/>
-                <a:sym typeface="Calibri"/>
-              </a:rPr>
-              <a:t>) sit behind chatbots, tutors, and assistants people rely on daily.</a:t>
-            </a:r>
-            <a:endParaRPr sz="1350" dirty="0">
-              <a:solidFill>
-                <a:schemeClr val="dk1"/>
-              </a:solidFill>
-              <a:latin typeface="Calibri"/>
-              <a:ea typeface="Calibri"/>
-              <a:cs typeface="Calibri"/>
-              <a:sym typeface="Calibri"/>
-            </a:endParaRPr>
-          </a:p>
-        </p:txBody>
-      </p:sp>
-      <p:sp>
-        <p:nvSpPr>
-          <p:cNvPr id="52" name="Google Shape;96;p5">
-            <a:extLst>
-              <a:ext uri="{FF2B5EF4-FFF2-40B4-BE49-F238E27FC236}">
-                <a16:creationId xmlns:a16="http://schemas.microsoft.com/office/drawing/2014/main" id="{47BBCB04-A759-68CF-9CCB-314A3CE9528C}"/>
-              </a:ext>
-            </a:extLst>
-          </p:cNvPr>
-          <p:cNvSpPr/>
-          <p:nvPr/>
-        </p:nvSpPr>
-        <p:spPr>
-          <a:xfrm>
-            <a:off x="6035040" y="1611629"/>
-            <a:ext cx="2503170" cy="1899385"/>
-          </a:xfrm>
-          <a:prstGeom prst="rect">
-            <a:avLst/>
-          </a:prstGeom>
-          <a:solidFill>
-            <a:srgbClr val="FFFFFF"/>
-          </a:solidFill>
-          <a:ln w="12700" cap="flat" cmpd="sng">
-            <a:solidFill>
-              <a:srgbClr val="E2E8F0"/>
-            </a:solidFill>
-            <a:prstDash val="solid"/>
-            <a:round/>
-            <a:headEnd type="none" w="sm" len="sm"/>
-            <a:tailEnd type="none" w="sm" len="sm"/>
-          </a:ln>
-        </p:spPr>
-        <p:txBody>
-          <a:bodyPr spcFirstLastPara="1" wrap="square" lIns="68569" tIns="68569" rIns="68569" bIns="68569" anchor="ctr" anchorCtr="0">
-            <a:noAutofit/>
-          </a:bodyPr>
-          <a:lstStyle/>
-          <a:p>
-            <a:endParaRPr sz="1350"/>
-          </a:p>
-        </p:txBody>
-      </p:sp>
-      <p:sp>
-        <p:nvSpPr>
-          <p:cNvPr id="53" name="Google Shape;97;p5">
-            <a:extLst>
-              <a:ext uri="{FF2B5EF4-FFF2-40B4-BE49-F238E27FC236}">
-                <a16:creationId xmlns:a16="http://schemas.microsoft.com/office/drawing/2014/main" id="{6433323F-AB50-57BA-8A61-A9DA79DB2D79}"/>
-              </a:ext>
-            </a:extLst>
-          </p:cNvPr>
-          <p:cNvSpPr/>
-          <p:nvPr/>
-        </p:nvSpPr>
-        <p:spPr>
-          <a:xfrm>
-            <a:off x="6240780" y="1817370"/>
-            <a:ext cx="96012" cy="96012"/>
-          </a:xfrm>
-          <a:prstGeom prst="ellipse">
-            <a:avLst/>
-          </a:prstGeom>
-          <a:solidFill>
-            <a:srgbClr val="800020"/>
-          </a:solidFill>
-          <a:ln>
-            <a:noFill/>
-          </a:ln>
-        </p:spPr>
-        <p:txBody>
-          <a:bodyPr spcFirstLastPara="1" wrap="square" lIns="68569" tIns="68569" rIns="68569" bIns="68569" anchor="ctr" anchorCtr="0">
-            <a:noAutofit/>
-          </a:bodyPr>
-          <a:lstStyle/>
-          <a:p>
-            <a:endParaRPr sz="1350"/>
-          </a:p>
-        </p:txBody>
-      </p:sp>
-      <p:sp>
-        <p:nvSpPr>
-          <p:cNvPr id="54" name="Google Shape;98;p5">
-            <a:extLst>
-              <a:ext uri="{FF2B5EF4-FFF2-40B4-BE49-F238E27FC236}">
-                <a16:creationId xmlns:a16="http://schemas.microsoft.com/office/drawing/2014/main" id="{A672CF80-11DB-CDC3-E909-6C17FCBB9DD3}"/>
-              </a:ext>
-            </a:extLst>
-          </p:cNvPr>
-          <p:cNvSpPr txBox="1"/>
-          <p:nvPr/>
-        </p:nvSpPr>
-        <p:spPr>
-          <a:xfrm>
-            <a:off x="6432804" y="1748790"/>
-            <a:ext cx="1885950" cy="240030"/>
-          </a:xfrm>
-          <a:prstGeom prst="rect">
-            <a:avLst/>
-          </a:prstGeom>
-          <a:noFill/>
-          <a:ln>
-            <a:noFill/>
-          </a:ln>
-        </p:spPr>
-        <p:txBody>
-          <a:bodyPr spcFirstLastPara="1" wrap="square" lIns="0" tIns="0" rIns="0" bIns="0" anchor="ctr" anchorCtr="0">
-            <a:noAutofit/>
-          </a:bodyPr>
-          <a:lstStyle/>
-          <a:p>
-            <a:pPr>
-              <a:buClr>
-                <a:srgbClr val="0F172A"/>
-              </a:buClr>
-              <a:buSzPts val="1600"/>
-            </a:pPr>
-            <a:r>
-              <a:rPr lang="en-US" sz="1200" b="1">
-                <a:solidFill>
-                  <a:srgbClr val="0F172A"/>
-                </a:solidFill>
-                <a:latin typeface="Century Schoolbook"/>
-                <a:ea typeface="Century Schoolbook"/>
-                <a:cs typeface="Century Schoolbook"/>
-                <a:sym typeface="Century Schoolbook"/>
-              </a:rPr>
-              <a:t>Multi-hop research</a:t>
-            </a:r>
-            <a:endParaRPr sz="1200">
-              <a:solidFill>
-                <a:schemeClr val="dk1"/>
-              </a:solidFill>
-              <a:latin typeface="Calibri"/>
-              <a:ea typeface="Calibri"/>
-              <a:cs typeface="Calibri"/>
-              <a:sym typeface="Calibri"/>
-            </a:endParaRPr>
-          </a:p>
-        </p:txBody>
-      </p:sp>
-      <p:sp>
-        <p:nvSpPr>
-          <p:cNvPr id="55" name="Google Shape;99;p5">
-            <a:extLst>
-              <a:ext uri="{FF2B5EF4-FFF2-40B4-BE49-F238E27FC236}">
-                <a16:creationId xmlns:a16="http://schemas.microsoft.com/office/drawing/2014/main" id="{B7B147B3-6676-D320-E31C-0A01EB6365BC}"/>
-              </a:ext>
-            </a:extLst>
-          </p:cNvPr>
-          <p:cNvSpPr txBox="1"/>
-          <p:nvPr/>
-        </p:nvSpPr>
-        <p:spPr>
-          <a:xfrm>
-            <a:off x="6277193" y="2125981"/>
-            <a:ext cx="2091600" cy="1252413"/>
-          </a:xfrm>
-          <a:prstGeom prst="rect">
-            <a:avLst/>
-          </a:prstGeom>
-          <a:noFill/>
-          <a:ln>
-            <a:noFill/>
-          </a:ln>
-        </p:spPr>
-        <p:txBody>
-          <a:bodyPr spcFirstLastPara="1" wrap="square" lIns="0" tIns="0" rIns="0" bIns="0" anchor="ctr" anchorCtr="0">
-            <a:noAutofit/>
-          </a:bodyPr>
-          <a:lstStyle/>
-          <a:p>
-            <a:pPr>
-              <a:lnSpc>
-                <a:spcPct val="125000"/>
-              </a:lnSpc>
-              <a:buClr>
-                <a:srgbClr val="334155"/>
-              </a:buClr>
-              <a:buSzPts val="1250"/>
-            </a:pPr>
-            <a:r>
-              <a:rPr lang="en-US" sz="1350" dirty="0">
-                <a:solidFill>
-                  <a:srgbClr val="334155"/>
-                </a:solidFill>
-                <a:latin typeface="Calibri"/>
-                <a:ea typeface="Calibri"/>
-                <a:cs typeface="Calibri"/>
-                <a:sym typeface="Calibri"/>
-              </a:rPr>
-              <a:t>Open-domain question answering (</a:t>
-            </a:r>
-            <a:r>
-              <a:rPr lang="en-US" sz="1350" dirty="0" err="1">
-                <a:solidFill>
-                  <a:srgbClr val="334155"/>
-                </a:solidFill>
-                <a:latin typeface="Calibri"/>
-                <a:ea typeface="Calibri"/>
-                <a:cs typeface="Calibri"/>
-                <a:sym typeface="Calibri"/>
-              </a:rPr>
-              <a:t>HotpotQA</a:t>
-            </a:r>
-            <a:r>
-              <a:rPr lang="en-US" sz="1350" dirty="0">
-                <a:solidFill>
-                  <a:srgbClr val="334155"/>
-                </a:solidFill>
-                <a:latin typeface="Calibri"/>
-                <a:ea typeface="Calibri"/>
-                <a:cs typeface="Calibri"/>
-                <a:sym typeface="Calibri"/>
-              </a:rPr>
-              <a:t>) chains several facts together, so one bad link breaks the whole chain.</a:t>
-            </a:r>
-            <a:endParaRPr sz="1350" dirty="0">
-              <a:solidFill>
-                <a:schemeClr val="dk1"/>
-              </a:solidFill>
-              <a:latin typeface="Calibri"/>
-              <a:ea typeface="Calibri"/>
-              <a:cs typeface="Calibri"/>
-              <a:sym typeface="Calibri"/>
-            </a:endParaRPr>
           </a:p>
         </p:txBody>
       </p:sp>
@@ -28087,7 +28162,7 @@
               <a:buNone/>
             </a:pPr>
             <a:r>
-              <a:rPr lang="en-US" sz="850" b="1" dirty="0">
+              <a:rPr lang="en-US" sz="850" b="1">
                 <a:solidFill>
                   <a:srgbClr val="64748B"/>
                 </a:solidFill>
@@ -28095,7 +28170,7 @@
                 <a:ea typeface="Calibri" pitchFamily="34" charset="-122"/>
                 <a:cs typeface="Calibri" pitchFamily="34" charset="-120"/>
               </a:rPr>
-              <a:t>05/24</a:t>
+              <a:t>05/23</a:t>
             </a:r>
             <a:endParaRPr lang="en-US" sz="850" dirty="0"/>
           </a:p>
@@ -30135,9 +30210,8 @@
                 <a:ea typeface="Calibri" pitchFamily="34" charset="-122"/>
                 <a:cs typeface="Calibri" pitchFamily="34" charset="-120"/>
               </a:rPr>
-              <a:t>2023 surge, same hidden helpers</a:t>
-            </a:r>
-            <a:endParaRPr lang="en-US" sz="1100" dirty="0"/>
+              <a:t>How 2023 was packed with self-correction hype</a:t>
+            </a:r>
           </a:p>
         </p:txBody>
       </p:sp>
@@ -33638,24 +33712,19 @@
           <a:bodyPr wrap="square" lIns="0" tIns="0" rIns="0" bIns="0" rtlCol="0" anchor="ctr"/>
           <a:lstStyle/>
           <a:p>
-            <a:pPr marL="0" indent="0" algn="ctr">
+            <a:pPr algn="ctr">
               <a:lnSpc>
                 <a:spcPct val="105000"/>
               </a:lnSpc>
-              <a:buNone/>
-            </a:pPr>
-            <a:r>
-              <a:rPr lang="en-US" sz="1000" dirty="0">
-                <a:solidFill>
-                  <a:srgbClr val="0F172A"/>
-                </a:solidFill>
-                <a:latin typeface="Calibri" pitchFamily="34" charset="0"/>
-                <a:ea typeface="Calibri" pitchFamily="34" charset="-122"/>
-                <a:cs typeface="Calibri" pitchFamily="34" charset="-120"/>
-              </a:rPr>
-              <a:t>Zero new facts. Shared weights and prompt bias invent errors where none existed.</a:t>
-            </a:r>
-            <a:endParaRPr lang="en-US" sz="1000" dirty="0"/>
+            </a:pPr>
+            <a:r>
+              <a:rPr lang="en-US" sz="1000" b="1" dirty="0"/>
+              <a:t>No new facts.</a:t>
+            </a:r>
+            <a:r>
+              <a:rPr lang="en-US" sz="1000" dirty="0"/>
+              <a:t> Shared models can hallucinate errors.</a:t>
+            </a:r>
           </a:p>
         </p:txBody>
       </p:sp>
@@ -33962,7 +34031,7 @@
               <a:buNone/>
             </a:pPr>
             <a:r>
-              <a:rPr lang="en-US" sz="650" b="1" dirty="0">
+              <a:rPr lang="en-US" sz="800" b="1" dirty="0">
                 <a:solidFill>
                   <a:srgbClr val="166534"/>
                 </a:solidFill>
@@ -33972,7 +34041,7 @@
               </a:rPr>
               <a:t>Executes</a:t>
             </a:r>
-            <a:endParaRPr lang="en-US" sz="650" dirty="0"/>
+            <a:endParaRPr lang="en-US" sz="800" dirty="0"/>
           </a:p>
         </p:txBody>
       </p:sp>
@@ -34038,7 +34107,7 @@
               <a:buNone/>
             </a:pPr>
             <a:r>
-              <a:rPr lang="en-US" sz="650" b="1" dirty="0">
+              <a:rPr lang="en-US" sz="800" b="1" dirty="0">
                 <a:solidFill>
                   <a:srgbClr val="166534"/>
                 </a:solidFill>
@@ -34048,7 +34117,7 @@
               </a:rPr>
               <a:t>Traceback</a:t>
             </a:r>
-            <a:endParaRPr lang="en-US" sz="650" dirty="0"/>
+            <a:endParaRPr lang="en-US" sz="800" dirty="0"/>
           </a:p>
         </p:txBody>
       </p:sp>
@@ -34312,8 +34381,8 @@
         </p:nvSpPr>
         <p:spPr>
           <a:xfrm>
-            <a:off x="4937760" y="3703599"/>
-            <a:ext cx="3429000" cy="347472"/>
+            <a:off x="4846320" y="3703599"/>
+            <a:ext cx="3611880" cy="347472"/>
           </a:xfrm>
           <a:prstGeom prst="rect">
             <a:avLst/>
@@ -34325,24 +34394,19 @@
           <a:bodyPr wrap="square" lIns="0" tIns="0" rIns="0" bIns="0" rtlCol="0" anchor="ctr"/>
           <a:lstStyle/>
           <a:p>
-            <a:pPr marL="0" indent="0" algn="ctr">
+            <a:pPr algn="ctr">
               <a:lnSpc>
                 <a:spcPct val="105000"/>
               </a:lnSpc>
-              <a:buNone/>
-            </a:pPr>
-            <a:r>
-              <a:rPr lang="en-US" sz="1000" dirty="0">
-                <a:solidFill>
-                  <a:srgbClr val="0F172A"/>
-                </a:solidFill>
-                <a:latin typeface="Calibri" pitchFamily="34" charset="0"/>
-                <a:ea typeface="Calibri" pitchFamily="34" charset="-122"/>
-                <a:cs typeface="Calibri" pitchFamily="34" charset="-120"/>
-              </a:rPr>
-              <a:t>Deterministic ground truth. Execution errors provide localized, factual correction signals.</a:t>
-            </a:r>
-            <a:endParaRPr lang="en-US" sz="1000" dirty="0"/>
+            </a:pPr>
+            <a:r>
+              <a:rPr lang="en-US" sz="1000" b="1" dirty="0"/>
+              <a:t>Deterministic truth. </a:t>
+            </a:r>
+            <a:r>
+              <a:rPr lang="en-US" sz="1000" dirty="0"/>
+              <a:t>Execution errors give precise correction signals.</a:t>
+            </a:r>
           </a:p>
         </p:txBody>
       </p:sp>
@@ -34559,48 +34623,6 @@
           </a:p>
         </p:txBody>
       </p:sp>
-      <p:sp>
-        <p:nvSpPr>
-          <p:cNvPr id="39" name="Text 2">
-            <a:extLst>
-              <a:ext uri="{FF2B5EF4-FFF2-40B4-BE49-F238E27FC236}">
-                <a16:creationId xmlns:a16="http://schemas.microsoft.com/office/drawing/2014/main" id="{DE6C1E47-083D-8EE4-2A44-10CE8BBBD919}"/>
-              </a:ext>
-            </a:extLst>
-          </p:cNvPr>
-          <p:cNvSpPr/>
-          <p:nvPr/>
-        </p:nvSpPr>
-        <p:spPr>
-          <a:xfrm>
-            <a:off x="548640" y="868680"/>
-            <a:ext cx="8046720" cy="274320"/>
-          </a:xfrm>
-          <a:prstGeom prst="rect">
-            <a:avLst/>
-          </a:prstGeom>
-          <a:noFill/>
-          <a:ln/>
-        </p:spPr>
-        <p:txBody>
-          <a:bodyPr wrap="square" lIns="0" tIns="0" rIns="0" bIns="0" rtlCol="0" anchor="ctr"/>
-          <a:lstStyle/>
-          <a:p>
-            <a:r>
-              <a:rPr lang="en-US" sz="1100" dirty="0">
-                <a:solidFill>
-                  <a:srgbClr val="64748B"/>
-                </a:solidFill>
-                <a:latin typeface="Calibri" pitchFamily="34" charset="0"/>
-                <a:ea typeface="Calibri" pitchFamily="34" charset="-122"/>
-                <a:cs typeface="Calibri" pitchFamily="34" charset="-120"/>
-              </a:rPr>
-              <a:t>Paired bars make inflation obvious</a:t>
-            </a:r>
-            <a:endParaRPr lang="en-US" sz="1100" dirty="0"/>
-          </a:p>
-        </p:txBody>
-      </p:sp>
       <p:graphicFrame>
         <p:nvGraphicFramePr>
           <p:cNvPr id="4" name="Chart 0">
@@ -34614,14 +34636,14 @@
           <p:nvPr>
             <p:extLst>
               <p:ext uri="{D42A27DB-BD31-4B8C-83A1-F6EECF244321}">
-                <p14:modId xmlns:p14="http://schemas.microsoft.com/office/powerpoint/2010/main" val="2353136879"/>
+                <p14:modId xmlns:p14="http://schemas.microsoft.com/office/powerpoint/2010/main" val="3196251071"/>
               </p:ext>
             </p:extLst>
           </p:nvPr>
         </p:nvGraphicFramePr>
         <p:xfrm>
-          <a:off x="548640" y="1174347"/>
-          <a:ext cx="4434840" cy="2697263"/>
+          <a:off x="548640" y="973837"/>
+          <a:ext cx="4434840" cy="2897774"/>
         </p:xfrm>
         <a:graphic>
           <a:graphicData uri="http://schemas.openxmlformats.org/drawingml/2006/chart">
@@ -35313,7 +35335,7 @@
                 <a:ea typeface="Calibri" pitchFamily="34" charset="-122"/>
                 <a:cs typeface="Calibri" pitchFamily="34" charset="-120"/>
               </a:rPr>
-              <a:t>Read the chart: red collapses to green at or below zero. No confounder survives a fair test.</a:t>
+              <a:t>Insights: Red collapses to green at or below zero. No confounder survives a fair test.</a:t>
             </a:r>
             <a:endParaRPr lang="en-US" sz="1200" dirty="0"/>
           </a:p>
@@ -35348,7 +35370,7 @@
           <a:p>
             <a:pPr algn="ctr"/>
             <a:r>
-              <a:rPr lang="en-US" sz="650" b="1" i="1" dirty="0">
+              <a:rPr lang="en-US" sz="800" b="1" i="1" dirty="0">
                 <a:solidFill>
                   <a:srgbClr val="0F172A"/>
                 </a:solidFill>
@@ -35356,9 +35378,9 @@
                 <a:ea typeface="Calibri" pitchFamily="34" charset="-122"/>
                 <a:cs typeface="Calibri" pitchFamily="34" charset="-120"/>
               </a:rPr>
-              <a:t>Figure : Accuracy Change (%) by Confounder Type</a:t>
-            </a:r>
-            <a:endParaRPr lang="en-US" sz="650" dirty="0"/>
+              <a:t>Figure-3: Accuracy Change (%) by Confounder Type</a:t>
+            </a:r>
+            <a:endParaRPr lang="en-US" sz="800" dirty="0"/>
           </a:p>
         </p:txBody>
       </p:sp>
@@ -35376,8 +35398,8 @@
         </p:nvSpPr>
         <p:spPr>
           <a:xfrm rot="16200000">
-            <a:off x="175260" y="2360019"/>
-            <a:ext cx="716280" cy="152400"/>
+            <a:off x="67056" y="2424027"/>
+            <a:ext cx="932688" cy="152400"/>
           </a:xfrm>
           <a:prstGeom prst="rect">
             <a:avLst/>
@@ -35391,7 +35413,7 @@
           <a:p>
             <a:pPr algn="ctr"/>
             <a:r>
-              <a:rPr lang="en-US" sz="650" i="1" dirty="0">
+              <a:rPr lang="en-US" sz="800" i="1" dirty="0">
                 <a:solidFill>
                   <a:srgbClr val="0F172A"/>
                 </a:solidFill>
@@ -35401,7 +35423,7 @@
               </a:rPr>
               <a:t>Accuracy Change (%)</a:t>
             </a:r>
-            <a:endParaRPr lang="en-US" sz="650" dirty="0"/>
+            <a:endParaRPr lang="en-US" sz="800" dirty="0"/>
           </a:p>
         </p:txBody>
       </p:sp>
@@ -35419,7 +35441,7 @@
         </p:nvSpPr>
         <p:spPr>
           <a:xfrm>
-            <a:off x="2407920" y="3817109"/>
+            <a:off x="2407920" y="3820604"/>
             <a:ext cx="716280" cy="159154"/>
           </a:xfrm>
           <a:prstGeom prst="rect">
@@ -35434,7 +35456,7 @@
           <a:p>
             <a:pPr algn="ctr"/>
             <a:r>
-              <a:rPr lang="en-US" sz="650" i="1" dirty="0">
+              <a:rPr lang="en-US" sz="800" i="1" dirty="0">
                 <a:solidFill>
                   <a:srgbClr val="0F172A"/>
                 </a:solidFill>
@@ -35444,7 +35466,7 @@
               </a:rPr>
               <a:t>Confounder Type</a:t>
             </a:r>
-            <a:endParaRPr lang="en-US" sz="650" dirty="0"/>
+            <a:endParaRPr lang="en-US" sz="800" dirty="0"/>
           </a:p>
         </p:txBody>
       </p:sp>

--- a/output/LLM_Self_Correction_ICLR2024_Group_Presentation-final.pptx
+++ b/output/LLM_Self_Correction_ICLR2024_Group_Presentation-final.pptx
@@ -4079,9 +4079,395 @@
           <a:lstStyle/>
           <a:p>
             <a:r>
+              <a:rPr lang="en-US" sz="1200" b="0" i="0" kern="1200" dirty="0">
+                <a:solidFill>
+                  <a:schemeClr val="tx1"/>
+                </a:solidFill>
+                <a:effectLst/>
+                <a:latin typeface="+mn-lt"/>
+                <a:ea typeface="+mn-ea"/>
+                <a:cs typeface="+mn-cs"/>
+              </a:rPr>
+              <a:t>Thank you, </a:t>
+            </a:r>
+            <a:r>
+              <a:rPr lang="en-US" sz="1200" b="0" i="0" kern="1200" dirty="0" err="1">
+                <a:solidFill>
+                  <a:schemeClr val="tx1"/>
+                </a:solidFill>
+                <a:effectLst/>
+                <a:latin typeface="+mn-lt"/>
+                <a:ea typeface="+mn-ea"/>
+                <a:cs typeface="+mn-cs"/>
+              </a:rPr>
+              <a:t>Srijon</a:t>
+            </a:r>
+            <a:r>
+              <a:rPr lang="en-US" sz="1200" b="0" i="0" kern="1200" dirty="0">
+                <a:solidFill>
+                  <a:schemeClr val="tx1"/>
+                </a:solidFill>
+                <a:effectLst/>
+                <a:latin typeface="+mn-lt"/>
+                <a:ea typeface="+mn-ea"/>
+                <a:cs typeface="+mn-cs"/>
+              </a:rPr>
+              <a:t>. I will now examine the prior literature and why earlier claims looked so convincing on paper.</a:t>
+            </a:r>
+          </a:p>
+          <a:p>
+            <a:endParaRPr lang="en-US" sz="1200" b="0" i="1" kern="1200" dirty="0">
+              <a:solidFill>
+                <a:schemeClr val="tx1"/>
+              </a:solidFill>
+              <a:effectLst/>
+              <a:latin typeface="+mn-lt"/>
+              <a:ea typeface="+mn-ea"/>
+              <a:cs typeface="+mn-cs"/>
+            </a:endParaRPr>
+          </a:p>
+          <a:p>
+            <a:r>
+              <a:rPr lang="en-US" sz="1200" b="0" i="1" kern="1200" dirty="0">
+                <a:solidFill>
+                  <a:schemeClr val="tx1"/>
+                </a:solidFill>
+                <a:effectLst/>
+                <a:latin typeface="+mn-lt"/>
+                <a:ea typeface="+mn-ea"/>
+                <a:cs typeface="+mn-cs"/>
+              </a:rPr>
+              <a:t>"If you followed AI research throughout 2023, it felt like every quarter brought a shiny new framework claiming language models could fix their own mistakes. It was the same excitement we see today whenever rumors drop about unreleased models like Fable 5.1 or secret codenames. Everyone wanted to believe that self-correction was a solved problem."</a:t>
+            </a:r>
+          </a:p>
+          <a:p>
+            <a:endParaRPr lang="en-US" sz="1200" b="0" i="1" kern="1200" dirty="0">
+              <a:solidFill>
+                <a:schemeClr val="tx1"/>
+              </a:solidFill>
+              <a:effectLst/>
+              <a:latin typeface="+mn-lt"/>
+              <a:ea typeface="+mn-ea"/>
+              <a:cs typeface="+mn-cs"/>
+            </a:endParaRPr>
+          </a:p>
+          <a:p>
+            <a:r>
+              <a:rPr lang="en-US" sz="1200" b="0" i="0" kern="1200" dirty="0">
+                <a:solidFill>
+                  <a:schemeClr val="tx1"/>
+                </a:solidFill>
+                <a:effectLst/>
+                <a:latin typeface="+mn-lt"/>
+                <a:ea typeface="+mn-ea"/>
+                <a:cs typeface="+mn-cs"/>
+              </a:rPr>
+              <a:t>Look at the four timeline cards across 2023 on our slide.</a:t>
+            </a:r>
+          </a:p>
+          <a:p>
+            <a:r>
+              <a:rPr lang="en-US" sz="1200" b="0" i="0" kern="1200" dirty="0">
+                <a:solidFill>
+                  <a:schemeClr val="tx1"/>
+                </a:solidFill>
+                <a:effectLst/>
+                <a:latin typeface="+mn-lt"/>
+                <a:ea typeface="+mn-ea"/>
+                <a:cs typeface="+mn-cs"/>
+              </a:rPr>
+              <a:t>In Q1, Kim and colleagues published </a:t>
+            </a:r>
+            <a:r>
+              <a:rPr lang="en-US" sz="1200" b="1" i="0" kern="1200" dirty="0">
+                <a:solidFill>
+                  <a:schemeClr val="tx1"/>
+                </a:solidFill>
+                <a:effectLst/>
+                <a:latin typeface="+mn-lt"/>
+                <a:ea typeface="+mn-ea"/>
+                <a:cs typeface="+mn-cs"/>
+              </a:rPr>
+              <a:t>RCI</a:t>
+            </a:r>
+            <a:r>
+              <a:rPr lang="en-US" sz="1200" b="0" i="0" kern="1200" dirty="0">
+                <a:solidFill>
+                  <a:schemeClr val="tx1"/>
+                </a:solidFill>
+                <a:effectLst/>
+                <a:latin typeface="+mn-lt"/>
+                <a:ea typeface="+mn-ea"/>
+                <a:cs typeface="+mn-cs"/>
+              </a:rPr>
+              <a:t>, claiming a 7% boost on math and reasoning by prompting the model to recursively critique its own code.</a:t>
+            </a:r>
+          </a:p>
+          <a:p>
+            <a:r>
+              <a:rPr lang="en-US" sz="1200" b="0" i="0" kern="1200" dirty="0">
+                <a:solidFill>
+                  <a:schemeClr val="tx1"/>
+                </a:solidFill>
+                <a:effectLst/>
+                <a:latin typeface="+mn-lt"/>
+                <a:ea typeface="+mn-ea"/>
+                <a:cs typeface="+mn-cs"/>
+              </a:rPr>
+              <a:t>In Q2, Shinn and colleagues introduced </a:t>
+            </a:r>
+            <a:r>
+              <a:rPr lang="en-US" sz="1200" b="1" i="0" kern="1200" dirty="0" err="1">
+                <a:solidFill>
+                  <a:schemeClr val="tx1"/>
+                </a:solidFill>
+                <a:effectLst/>
+                <a:latin typeface="+mn-lt"/>
+                <a:ea typeface="+mn-ea"/>
+                <a:cs typeface="+mn-cs"/>
+              </a:rPr>
+              <a:t>Reflexion</a:t>
+            </a:r>
+            <a:r>
+              <a:rPr lang="en-US" sz="1200" b="0" i="0" kern="1200" dirty="0">
+                <a:solidFill>
+                  <a:schemeClr val="tx1"/>
+                </a:solidFill>
+                <a:effectLst/>
+                <a:latin typeface="+mn-lt"/>
+                <a:ea typeface="+mn-ea"/>
+                <a:cs typeface="+mn-cs"/>
+              </a:rPr>
+              <a:t>, claiming an 11% improvement by storing verbal reflections across multiple trials.</a:t>
+            </a:r>
+          </a:p>
+          <a:p>
+            <a:r>
+              <a:rPr lang="en-US" sz="1200" b="0" i="0" kern="1200" dirty="0">
+                <a:solidFill>
+                  <a:schemeClr val="tx1"/>
+                </a:solidFill>
+                <a:effectLst/>
+                <a:latin typeface="+mn-lt"/>
+                <a:ea typeface="+mn-ea"/>
+                <a:cs typeface="+mn-cs"/>
+              </a:rPr>
+              <a:t>In Q3, Madaan and colleagues introduced </a:t>
+            </a:r>
+            <a:r>
+              <a:rPr lang="en-US" sz="1200" b="1" i="0" kern="1200" dirty="0">
+                <a:solidFill>
+                  <a:schemeClr val="tx1"/>
+                </a:solidFill>
+                <a:effectLst/>
+                <a:latin typeface="+mn-lt"/>
+                <a:ea typeface="+mn-ea"/>
+                <a:cs typeface="+mn-cs"/>
+              </a:rPr>
+              <a:t>Self-Refine</a:t>
+            </a:r>
+            <a:r>
+              <a:rPr lang="en-US" sz="1200" b="0" i="0" kern="1200" dirty="0">
+                <a:solidFill>
+                  <a:schemeClr val="tx1"/>
+                </a:solidFill>
+                <a:effectLst/>
+                <a:latin typeface="+mn-lt"/>
+                <a:ea typeface="+mn-ea"/>
+                <a:cs typeface="+mn-cs"/>
+              </a:rPr>
+              <a:t>, reporting a 10% gain using structured feedback checklists.</a:t>
+            </a:r>
+          </a:p>
+          <a:p>
+            <a:r>
+              <a:rPr lang="en-US" sz="1200" b="0" i="0" kern="1200" dirty="0">
+                <a:solidFill>
+                  <a:schemeClr val="tx1"/>
+                </a:solidFill>
+                <a:effectLst/>
+                <a:latin typeface="+mn-lt"/>
+                <a:ea typeface="+mn-ea"/>
+                <a:cs typeface="+mn-cs"/>
+              </a:rPr>
+              <a:t>And in Q4, Du and colleagues claimed </a:t>
+            </a:r>
+            <a:r>
+              <a:rPr lang="en-US" sz="1200" b="1" i="0" kern="1200" dirty="0">
+                <a:solidFill>
+                  <a:schemeClr val="tx1"/>
+                </a:solidFill>
+                <a:effectLst/>
+                <a:latin typeface="+mn-lt"/>
+                <a:ea typeface="+mn-ea"/>
+                <a:cs typeface="+mn-cs"/>
+              </a:rPr>
+              <a:t>Multi-Agent Debate</a:t>
+            </a:r>
+            <a:r>
+              <a:rPr lang="en-US" sz="1200" b="0" i="0" kern="1200" dirty="0">
+                <a:solidFill>
+                  <a:schemeClr val="tx1"/>
+                </a:solidFill>
+                <a:effectLst/>
+                <a:latin typeface="+mn-lt"/>
+                <a:ea typeface="+mn-ea"/>
+                <a:cs typeface="+mn-cs"/>
+              </a:rPr>
+              <a:t> gave another 4% boost by having multiple instances debate divergent answers.</a:t>
+            </a:r>
+          </a:p>
+          <a:p>
+            <a:endParaRPr lang="en-US" sz="1200" b="0" i="0" kern="1200" dirty="0">
+              <a:solidFill>
+                <a:schemeClr val="tx1"/>
+              </a:solidFill>
+              <a:effectLst/>
+              <a:latin typeface="+mn-lt"/>
+              <a:ea typeface="+mn-ea"/>
+              <a:cs typeface="+mn-cs"/>
+            </a:endParaRPr>
+          </a:p>
+          <a:p>
+            <a:r>
+              <a:rPr lang="en-US" sz="1200" b="0" i="0" kern="1200" dirty="0">
+                <a:solidFill>
+                  <a:schemeClr val="tx1"/>
+                </a:solidFill>
+                <a:effectLst/>
+                <a:latin typeface="+mn-lt"/>
+                <a:ea typeface="+mn-ea"/>
+                <a:cs typeface="+mn-cs"/>
+              </a:rPr>
+              <a:t>On the surface, these numbers looked great. But look at the callout at the bottom of the slide: </a:t>
+            </a:r>
+            <a:r>
+              <a:rPr lang="en-US" sz="1200" b="1" i="0" kern="1200" dirty="0">
+                <a:solidFill>
+                  <a:schemeClr val="tx1"/>
+                </a:solidFill>
+                <a:effectLst/>
+                <a:latin typeface="+mn-lt"/>
+                <a:ea typeface="+mn-ea"/>
+                <a:cs typeface="+mn-cs"/>
+              </a:rPr>
+              <a:t>what the timeline hides</a:t>
+            </a:r>
+            <a:r>
+              <a:rPr lang="en-US" sz="1200" b="0" i="0" kern="1200" dirty="0">
+                <a:solidFill>
+                  <a:schemeClr val="tx1"/>
+                </a:solidFill>
+                <a:effectLst/>
+                <a:latin typeface="+mn-lt"/>
+                <a:ea typeface="+mn-ea"/>
+                <a:cs typeface="+mn-cs"/>
+              </a:rPr>
+              <a:t>.</a:t>
+            </a:r>
+          </a:p>
+          <a:p>
+            <a:endParaRPr lang="en-US" sz="1200" b="0" i="0" kern="1200" dirty="0">
+              <a:solidFill>
+                <a:schemeClr val="tx1"/>
+              </a:solidFill>
+              <a:effectLst/>
+              <a:latin typeface="+mn-lt"/>
+              <a:ea typeface="+mn-ea"/>
+              <a:cs typeface="+mn-cs"/>
+            </a:endParaRPr>
+          </a:p>
+          <a:p>
+            <a:r>
+              <a:rPr lang="en-US" sz="1200" b="0" i="0" kern="1200" dirty="0">
+                <a:solidFill>
+                  <a:schemeClr val="tx1"/>
+                </a:solidFill>
+                <a:effectLst/>
+                <a:latin typeface="+mn-lt"/>
+                <a:ea typeface="+mn-ea"/>
+                <a:cs typeface="+mn-cs"/>
+              </a:rPr>
+              <a:t>When you inspect the experimental setups, none of these gains came from intrinsic self-correction. Both RCI and </a:t>
+            </a:r>
+            <a:r>
+              <a:rPr lang="en-US" sz="1200" b="0" i="0" kern="1200" dirty="0" err="1">
+                <a:solidFill>
+                  <a:schemeClr val="tx1"/>
+                </a:solidFill>
+                <a:effectLst/>
+                <a:latin typeface="+mn-lt"/>
+                <a:ea typeface="+mn-ea"/>
+                <a:cs typeface="+mn-cs"/>
+              </a:rPr>
+              <a:t>Reflexion</a:t>
+            </a:r>
+            <a:r>
+              <a:rPr lang="en-US" sz="1200" b="0" i="0" kern="1200" dirty="0">
+                <a:solidFill>
+                  <a:schemeClr val="tx1"/>
+                </a:solidFill>
+                <a:effectLst/>
+                <a:latin typeface="+mn-lt"/>
+                <a:ea typeface="+mn-ea"/>
+                <a:cs typeface="+mn-cs"/>
+              </a:rPr>
+              <a:t> relied on </a:t>
+            </a:r>
+            <a:r>
+              <a:rPr lang="en-US" sz="1200" b="1" i="0" kern="1200" dirty="0">
+                <a:solidFill>
+                  <a:schemeClr val="tx1"/>
+                </a:solidFill>
+                <a:effectLst/>
+                <a:latin typeface="+mn-lt"/>
+                <a:ea typeface="+mn-ea"/>
+                <a:cs typeface="+mn-cs"/>
+              </a:rPr>
+              <a:t>oracle leakage</a:t>
+            </a:r>
+            <a:r>
+              <a:rPr lang="en-US" sz="1200" b="0" i="0" kern="1200" dirty="0">
+                <a:solidFill>
+                  <a:schemeClr val="tx1"/>
+                </a:solidFill>
+                <a:effectLst/>
+                <a:latin typeface="+mn-lt"/>
+                <a:ea typeface="+mn-ea"/>
+                <a:cs typeface="+mn-cs"/>
+              </a:rPr>
+              <a:t>, meaning the test harness secretly told the model when it got an answer wrong. Self-Refine relied on a </a:t>
+            </a:r>
+            <a:r>
+              <a:rPr lang="en-US" sz="1200" b="1" i="0" kern="1200" dirty="0">
+                <a:solidFill>
+                  <a:schemeClr val="tx1"/>
+                </a:solidFill>
+                <a:effectLst/>
+                <a:latin typeface="+mn-lt"/>
+                <a:ea typeface="+mn-ea"/>
+                <a:cs typeface="+mn-cs"/>
+              </a:rPr>
+              <a:t>prompt trick</a:t>
+            </a:r>
+            <a:r>
+              <a:rPr lang="en-US" sz="1200" b="0" i="0" kern="1200" dirty="0">
+                <a:solidFill>
+                  <a:schemeClr val="tx1"/>
+                </a:solidFill>
+                <a:effectLst/>
+                <a:latin typeface="+mn-lt"/>
+                <a:ea typeface="+mn-ea"/>
+                <a:cs typeface="+mn-cs"/>
+              </a:rPr>
+              <a:t>, where rules were omitted in the initial prompt and only provided during feedback. And Multi-Agent Debate simply burned three to six times more compute.</a:t>
+            </a:r>
+          </a:p>
+          <a:p>
+            <a:br>
               <a:rPr lang="en-US" dirty="0"/>
-              <a:t>Speaker: Srijon reviews the four prior self-correction frameworks and their operational loops, highlighting that reported gains stemmed from evaluation confounders.</a:t>
-            </a:r>
+            </a:br>
+            <a:endParaRPr lang="en-US" dirty="0"/>
           </a:p>
         </p:txBody>
       </p:sp>
@@ -4184,8 +4570,299 @@
           <a:lstStyle/>
           <a:p>
             <a:r>
-              <a:rPr lang="en-US" dirty="0"/>
-              <a:t>Speaker: Srijon reviews the four prior self-correction frameworks and their operational loops, highlighting that reported gains stemmed from evaluation confounders.</a:t>
+              <a:rPr lang="en-US" sz="1200" b="0" i="0" kern="1200" dirty="0">
+                <a:solidFill>
+                  <a:schemeClr val="tx1"/>
+                </a:solidFill>
+                <a:effectLst/>
+                <a:latin typeface="+mn-lt"/>
+                <a:ea typeface="+mn-ea"/>
+                <a:cs typeface="+mn-cs"/>
+              </a:rPr>
+              <a:t>This slide illustrates the core distinction that prior literature often conflated: a </a:t>
+            </a:r>
+            <a:r>
+              <a:rPr lang="en-US" sz="1200" b="1" i="0" kern="1200" dirty="0">
+                <a:solidFill>
+                  <a:schemeClr val="tx1"/>
+                </a:solidFill>
+                <a:effectLst/>
+                <a:latin typeface="+mn-lt"/>
+                <a:ea typeface="+mn-ea"/>
+                <a:cs typeface="+mn-cs"/>
+              </a:rPr>
+              <a:t>closed loop</a:t>
+            </a:r>
+            <a:r>
+              <a:rPr lang="en-US" sz="1200" b="0" i="0" kern="1200" dirty="0">
+                <a:solidFill>
+                  <a:schemeClr val="tx1"/>
+                </a:solidFill>
+                <a:effectLst/>
+                <a:latin typeface="+mn-lt"/>
+                <a:ea typeface="+mn-ea"/>
+                <a:cs typeface="+mn-cs"/>
+              </a:rPr>
+              <a:t> versus a </a:t>
+            </a:r>
+            <a:r>
+              <a:rPr lang="en-US" sz="1200" b="1" i="0" kern="1200" dirty="0">
+                <a:solidFill>
+                  <a:schemeClr val="tx1"/>
+                </a:solidFill>
+                <a:effectLst/>
+                <a:latin typeface="+mn-lt"/>
+                <a:ea typeface="+mn-ea"/>
+                <a:cs typeface="+mn-cs"/>
+              </a:rPr>
+              <a:t>grounded loop</a:t>
+            </a:r>
+            <a:r>
+              <a:rPr lang="en-US" sz="1200" b="0" i="0" kern="1200" dirty="0">
+                <a:solidFill>
+                  <a:schemeClr val="tx1"/>
+                </a:solidFill>
+                <a:effectLst/>
+                <a:latin typeface="+mn-lt"/>
+                <a:ea typeface="+mn-ea"/>
+                <a:cs typeface="+mn-cs"/>
+              </a:rPr>
+              <a:t>.</a:t>
+            </a:r>
+          </a:p>
+          <a:p>
+            <a:endParaRPr lang="en-US" sz="1200" b="0" i="0" kern="1200" dirty="0">
+              <a:solidFill>
+                <a:schemeClr val="tx1"/>
+              </a:solidFill>
+              <a:effectLst/>
+              <a:latin typeface="+mn-lt"/>
+              <a:ea typeface="+mn-ea"/>
+              <a:cs typeface="+mn-cs"/>
+            </a:endParaRPr>
+          </a:p>
+          <a:p>
+            <a:r>
+              <a:rPr lang="en-US" sz="1200" b="0" i="0" kern="1200" dirty="0">
+                <a:solidFill>
+                  <a:schemeClr val="tx1"/>
+                </a:solidFill>
+                <a:effectLst/>
+                <a:latin typeface="+mn-lt"/>
+                <a:ea typeface="+mn-ea"/>
+                <a:cs typeface="+mn-cs"/>
+              </a:rPr>
+              <a:t>Look at the red box on the left. This is the </a:t>
+            </a:r>
+            <a:r>
+              <a:rPr lang="en-US" sz="1200" b="1" i="0" kern="1200" dirty="0">
+                <a:solidFill>
+                  <a:schemeClr val="tx1"/>
+                </a:solidFill>
+                <a:effectLst/>
+                <a:latin typeface="+mn-lt"/>
+                <a:ea typeface="+mn-ea"/>
+                <a:cs typeface="+mn-cs"/>
+              </a:rPr>
+              <a:t>closed loop</a:t>
+            </a:r>
+            <a:r>
+              <a:rPr lang="en-US" sz="1200" b="0" i="0" kern="1200" dirty="0">
+                <a:solidFill>
+                  <a:schemeClr val="tx1"/>
+                </a:solidFill>
+                <a:effectLst/>
+                <a:latin typeface="+mn-lt"/>
+                <a:ea typeface="+mn-ea"/>
+                <a:cs typeface="+mn-cs"/>
+              </a:rPr>
+              <a:t>, which is the exact focus of our paper. The model generates an initial answer, receives an unguided prompt to find flaws, and attempts a blind revision.</a:t>
+            </a:r>
+          </a:p>
+          <a:p>
+            <a:endParaRPr lang="en-US" sz="1200" b="0" i="0" kern="1200" dirty="0">
+              <a:solidFill>
+                <a:schemeClr val="tx1"/>
+              </a:solidFill>
+              <a:effectLst/>
+              <a:latin typeface="+mn-lt"/>
+              <a:ea typeface="+mn-ea"/>
+              <a:cs typeface="+mn-cs"/>
+            </a:endParaRPr>
+          </a:p>
+          <a:p>
+            <a:r>
+              <a:rPr lang="en-US" sz="1200" b="0" i="0" kern="1200" dirty="0">
+                <a:solidFill>
+                  <a:schemeClr val="tx1"/>
+                </a:solidFill>
+                <a:effectLst/>
+                <a:latin typeface="+mn-lt"/>
+                <a:ea typeface="+mn-ea"/>
+                <a:cs typeface="+mn-cs"/>
+              </a:rPr>
+              <a:t>Notice the fundamental flaw: zero new information enters the system. The weights of the model are frozen. You are asking the exact same network that made the error to spot its own error.</a:t>
+            </a:r>
+          </a:p>
+          <a:p>
+            <a:endParaRPr lang="en-US" sz="1200" b="0" i="1" kern="1200" dirty="0">
+              <a:solidFill>
+                <a:schemeClr val="tx1"/>
+              </a:solidFill>
+              <a:effectLst/>
+              <a:latin typeface="+mn-lt"/>
+              <a:ea typeface="+mn-ea"/>
+              <a:cs typeface="+mn-cs"/>
+            </a:endParaRPr>
+          </a:p>
+          <a:p>
+            <a:r>
+              <a:rPr lang="en-US" sz="1200" b="0" i="1" kern="1200" dirty="0">
+                <a:solidFill>
+                  <a:schemeClr val="tx1"/>
+                </a:solidFill>
+                <a:effectLst/>
+                <a:latin typeface="+mn-lt"/>
+                <a:ea typeface="+mn-ea"/>
+                <a:cs typeface="+mn-cs"/>
+              </a:rPr>
+              <a:t>"Anyone who has experimented with language models knows what happens next. If you ask an LLM, 'Are you sure about that?', it immediately panics, apologizes for a mistake it never made, and turns a correct answer into a completely broken one."</a:t>
+            </a:r>
+          </a:p>
+          <a:p>
+            <a:r>
+              <a:rPr lang="en-US" sz="1200" b="0" i="0" kern="1200" dirty="0">
+                <a:solidFill>
+                  <a:schemeClr val="tx1"/>
+                </a:solidFill>
+                <a:effectLst/>
+                <a:latin typeface="+mn-lt"/>
+                <a:ea typeface="+mn-ea"/>
+                <a:cs typeface="+mn-cs"/>
+              </a:rPr>
+              <a:t>Because of this compliance bias and lack of external truth, intrinsic self-correction consistently decreases accuracy by </a:t>
+            </a:r>
+            <a:r>
+              <a:rPr lang="en-US" sz="1200" b="1" i="0" kern="1200" dirty="0">
+                <a:solidFill>
+                  <a:schemeClr val="tx1"/>
+                </a:solidFill>
+                <a:effectLst/>
+                <a:latin typeface="+mn-lt"/>
+                <a:ea typeface="+mn-ea"/>
+                <a:cs typeface="+mn-cs"/>
+              </a:rPr>
+              <a:t>1.3% to 27.5%</a:t>
+            </a:r>
+            <a:r>
+              <a:rPr lang="en-US" sz="1200" b="0" i="0" kern="1200" dirty="0">
+                <a:solidFill>
+                  <a:schemeClr val="tx1"/>
+                </a:solidFill>
+                <a:effectLst/>
+                <a:latin typeface="+mn-lt"/>
+                <a:ea typeface="+mn-ea"/>
+                <a:cs typeface="+mn-cs"/>
+              </a:rPr>
+              <a:t>.</a:t>
+            </a:r>
+          </a:p>
+          <a:p>
+            <a:endParaRPr lang="en-US" sz="1200" b="0" i="0" kern="1200" dirty="0">
+              <a:solidFill>
+                <a:schemeClr val="tx1"/>
+              </a:solidFill>
+              <a:effectLst/>
+              <a:latin typeface="+mn-lt"/>
+              <a:ea typeface="+mn-ea"/>
+              <a:cs typeface="+mn-cs"/>
+            </a:endParaRPr>
+          </a:p>
+          <a:p>
+            <a:r>
+              <a:rPr lang="en-US" sz="1200" b="0" i="0" kern="1200" dirty="0">
+                <a:solidFill>
+                  <a:schemeClr val="tx1"/>
+                </a:solidFill>
+                <a:effectLst/>
+                <a:latin typeface="+mn-lt"/>
+                <a:ea typeface="+mn-ea"/>
+                <a:cs typeface="+mn-cs"/>
+              </a:rPr>
+              <a:t>Now look at the green box on the right. This is the </a:t>
+            </a:r>
+            <a:r>
+              <a:rPr lang="en-US" sz="1200" b="1" i="0" kern="1200" dirty="0">
+                <a:solidFill>
+                  <a:schemeClr val="tx1"/>
+                </a:solidFill>
+                <a:effectLst/>
+                <a:latin typeface="+mn-lt"/>
+                <a:ea typeface="+mn-ea"/>
+                <a:cs typeface="+mn-cs"/>
+              </a:rPr>
+              <a:t>grounded loop</a:t>
+            </a:r>
+            <a:r>
+              <a:rPr lang="en-US" sz="1200" b="0" i="0" kern="1200" dirty="0">
+                <a:solidFill>
+                  <a:schemeClr val="tx1"/>
+                </a:solidFill>
+                <a:effectLst/>
+                <a:latin typeface="+mn-lt"/>
+                <a:ea typeface="+mn-ea"/>
+                <a:cs typeface="+mn-cs"/>
+              </a:rPr>
+              <a:t>, and this is where self-correction genuinely works.</a:t>
+            </a:r>
+          </a:p>
+          <a:p>
+            <a:endParaRPr lang="en-US" sz="1200" b="0" i="0" kern="1200" dirty="0">
+              <a:solidFill>
+                <a:schemeClr val="tx1"/>
+              </a:solidFill>
+              <a:effectLst/>
+              <a:latin typeface="+mn-lt"/>
+              <a:ea typeface="+mn-ea"/>
+              <a:cs typeface="+mn-cs"/>
+            </a:endParaRPr>
+          </a:p>
+          <a:p>
+            <a:r>
+              <a:rPr lang="en-US" sz="1200" b="0" i="0" kern="1200" dirty="0">
+                <a:solidFill>
+                  <a:schemeClr val="tx1"/>
+                </a:solidFill>
+                <a:effectLst/>
+                <a:latin typeface="+mn-lt"/>
+                <a:ea typeface="+mn-ea"/>
+                <a:cs typeface="+mn-cs"/>
+              </a:rPr>
+              <a:t>Here, the model writes executable code or equations and runs them in a deterministic environment like a Python interpreter. When the execution fails with an exact traceback, the model conditions its update on objective ground truth. That produces real gains between </a:t>
+            </a:r>
+            <a:r>
+              <a:rPr lang="en-US" sz="1200" b="1" i="0" kern="1200" dirty="0">
+                <a:solidFill>
+                  <a:schemeClr val="tx1"/>
+                </a:solidFill>
+                <a:effectLst/>
+                <a:latin typeface="+mn-lt"/>
+                <a:ea typeface="+mn-ea"/>
+                <a:cs typeface="+mn-cs"/>
+              </a:rPr>
+              <a:t>7% and 15%</a:t>
+            </a:r>
+            <a:r>
+              <a:rPr lang="en-US" sz="1200" b="0" i="0" kern="1200" dirty="0">
+                <a:solidFill>
+                  <a:schemeClr val="tx1"/>
+                </a:solidFill>
+                <a:effectLst/>
+                <a:latin typeface="+mn-lt"/>
+                <a:ea typeface="+mn-ea"/>
+                <a:cs typeface="+mn-cs"/>
+              </a:rPr>
+              <a:t>.</a:t>
             </a:r>
           </a:p>
         </p:txBody>
@@ -4295,8 +4972,265 @@
           <a:lstStyle/>
           <a:p>
             <a:r>
-              <a:rPr lang="en-US" dirty="0"/>
-              <a:t>Speaker: Srijon reviews the four prior self-correction frameworks and their operational loops, highlighting that reported gains stemmed from evaluation confounders.</a:t>
+              <a:rPr lang="en-US" sz="1200" b="0" i="0" kern="1200" dirty="0">
+                <a:solidFill>
+                  <a:schemeClr val="tx1"/>
+                </a:solidFill>
+                <a:effectLst/>
+                <a:latin typeface="+mn-lt"/>
+                <a:ea typeface="+mn-ea"/>
+                <a:cs typeface="+mn-cs"/>
+              </a:rPr>
+              <a:t>On this slide, we present the forensic breakdown of prior claims.</a:t>
+            </a:r>
+          </a:p>
+          <a:p>
+            <a:r>
+              <a:rPr lang="en-US" sz="1200" b="0" i="0" kern="1200" dirty="0">
+                <a:solidFill>
+                  <a:schemeClr val="tx1"/>
+                </a:solidFill>
+                <a:effectLst/>
+                <a:latin typeface="+mn-lt"/>
+                <a:ea typeface="+mn-ea"/>
+                <a:cs typeface="+mn-cs"/>
+              </a:rPr>
+              <a:t>Look at the paired bar chart on the left. The red bars represent the claimed accuracy improvements from earlier literature. The green bars represent what happens when you run a controlled, scientifically rigorous test.</a:t>
+            </a:r>
+          </a:p>
+          <a:p>
+            <a:endParaRPr lang="en-US" sz="1200" b="0" i="0" kern="1200" dirty="0">
+              <a:solidFill>
+                <a:schemeClr val="tx1"/>
+              </a:solidFill>
+              <a:effectLst/>
+              <a:latin typeface="+mn-lt"/>
+              <a:ea typeface="+mn-ea"/>
+              <a:cs typeface="+mn-cs"/>
+            </a:endParaRPr>
+          </a:p>
+          <a:p>
+            <a:r>
+              <a:rPr lang="en-US" sz="1200" b="0" i="0" kern="1200" dirty="0">
+                <a:solidFill>
+                  <a:schemeClr val="tx1"/>
+                </a:solidFill>
+                <a:effectLst/>
+                <a:latin typeface="+mn-lt"/>
+                <a:ea typeface="+mn-ea"/>
+                <a:cs typeface="+mn-cs"/>
+              </a:rPr>
+              <a:t>Notice the striking pattern: every single red bar collapses straight down into green, ending up at or below zero.</a:t>
+            </a:r>
+          </a:p>
+          <a:p>
+            <a:r>
+              <a:rPr lang="en-US" sz="1200" b="0" i="0" kern="1200" dirty="0">
+                <a:solidFill>
+                  <a:schemeClr val="tx1"/>
+                </a:solidFill>
+                <a:effectLst/>
+                <a:latin typeface="+mn-lt"/>
+                <a:ea typeface="+mn-ea"/>
+                <a:cs typeface="+mn-cs"/>
+              </a:rPr>
+              <a:t>Let us walk through the three cards on the right.</a:t>
+            </a:r>
+          </a:p>
+          <a:p>
+            <a:endParaRPr lang="en-US" sz="1200" b="0" i="0" kern="1200" dirty="0">
+              <a:solidFill>
+                <a:schemeClr val="tx1"/>
+              </a:solidFill>
+              <a:effectLst/>
+              <a:latin typeface="+mn-lt"/>
+              <a:ea typeface="+mn-ea"/>
+              <a:cs typeface="+mn-cs"/>
+            </a:endParaRPr>
+          </a:p>
+          <a:p>
+            <a:r>
+              <a:rPr lang="en-US" sz="1200" b="0" i="0" kern="1200" dirty="0">
+                <a:solidFill>
+                  <a:schemeClr val="tx1"/>
+                </a:solidFill>
+                <a:effectLst/>
+                <a:latin typeface="+mn-lt"/>
+                <a:ea typeface="+mn-ea"/>
+                <a:cs typeface="+mn-cs"/>
+              </a:rPr>
+              <a:t>First, </a:t>
+            </a:r>
+            <a:r>
+              <a:rPr lang="en-US" sz="1200" b="1" i="0" kern="1200" dirty="0">
+                <a:solidFill>
+                  <a:schemeClr val="tx1"/>
+                </a:solidFill>
+                <a:effectLst/>
+                <a:latin typeface="+mn-lt"/>
+                <a:ea typeface="+mn-ea"/>
+                <a:cs typeface="+mn-cs"/>
+              </a:rPr>
+              <a:t>Oracle Leakage</a:t>
+            </a:r>
+            <a:r>
+              <a:rPr lang="en-US" sz="1200" b="0" i="0" kern="1200" dirty="0">
+                <a:solidFill>
+                  <a:schemeClr val="tx1"/>
+                </a:solidFill>
+                <a:effectLst/>
+                <a:latin typeface="+mn-lt"/>
+                <a:ea typeface="+mn-ea"/>
+                <a:cs typeface="+mn-cs"/>
+              </a:rPr>
+              <a:t>. Papers like RCI and </a:t>
+            </a:r>
+            <a:r>
+              <a:rPr lang="en-US" sz="1200" b="0" i="0" kern="1200" dirty="0" err="1">
+                <a:solidFill>
+                  <a:schemeClr val="tx1"/>
+                </a:solidFill>
+                <a:effectLst/>
+                <a:latin typeface="+mn-lt"/>
+                <a:ea typeface="+mn-ea"/>
+                <a:cs typeface="+mn-cs"/>
+              </a:rPr>
+              <a:t>Reflexion</a:t>
+            </a:r>
+            <a:r>
+              <a:rPr lang="en-US" sz="1200" b="0" i="0" kern="1200" dirty="0">
+                <a:solidFill>
+                  <a:schemeClr val="tx1"/>
+                </a:solidFill>
+                <a:effectLst/>
+                <a:latin typeface="+mn-lt"/>
+                <a:ea typeface="+mn-ea"/>
+                <a:cs typeface="+mn-cs"/>
+              </a:rPr>
+              <a:t> reported gains of around 10.5%. But their evaluation harness secretly used ground truth labels to shield correct answers. The model was only prompted to self-correct when its answer was already wrong.</a:t>
+            </a:r>
+          </a:p>
+          <a:p>
+            <a:endParaRPr lang="en-US" sz="1200" b="0" i="1" kern="1200" dirty="0">
+              <a:solidFill>
+                <a:schemeClr val="tx1"/>
+              </a:solidFill>
+              <a:effectLst/>
+              <a:latin typeface="+mn-lt"/>
+              <a:ea typeface="+mn-ea"/>
+              <a:cs typeface="+mn-cs"/>
+            </a:endParaRPr>
+          </a:p>
+          <a:p>
+            <a:r>
+              <a:rPr lang="en-US" sz="1200" b="0" i="1" kern="1200" dirty="0">
+                <a:solidFill>
+                  <a:schemeClr val="tx1"/>
+                </a:solidFill>
+                <a:effectLst/>
+                <a:latin typeface="+mn-lt"/>
+                <a:ea typeface="+mn-ea"/>
+                <a:cs typeface="+mn-cs"/>
+              </a:rPr>
+              <a:t>"That is like taking a multiple choice exam where the teacher only taps your desk when you pick the wrong answer and lets you guess again. In real applications, you do not have an oracle. When you prompt the model on all questions, accuracy drops by 2.5%."</a:t>
+            </a:r>
+          </a:p>
+          <a:p>
+            <a:endParaRPr lang="en-US" sz="1200" b="0" i="1" kern="1200" dirty="0">
+              <a:solidFill>
+                <a:schemeClr val="tx1"/>
+              </a:solidFill>
+              <a:effectLst/>
+              <a:latin typeface="+mn-lt"/>
+              <a:ea typeface="+mn-ea"/>
+              <a:cs typeface="+mn-cs"/>
+            </a:endParaRPr>
+          </a:p>
+          <a:p>
+            <a:r>
+              <a:rPr lang="en-US" sz="1200" b="0" i="0" kern="1200" dirty="0">
+                <a:solidFill>
+                  <a:schemeClr val="tx1"/>
+                </a:solidFill>
+                <a:effectLst/>
+                <a:latin typeface="+mn-lt"/>
+                <a:ea typeface="+mn-ea"/>
+                <a:cs typeface="+mn-cs"/>
+              </a:rPr>
+              <a:t>Second, the </a:t>
+            </a:r>
+            <a:r>
+              <a:rPr lang="en-US" sz="1200" b="1" i="0" kern="1200" dirty="0">
+                <a:solidFill>
+                  <a:schemeClr val="tx1"/>
+                </a:solidFill>
+                <a:effectLst/>
+                <a:latin typeface="+mn-lt"/>
+                <a:ea typeface="+mn-ea"/>
+                <a:cs typeface="+mn-cs"/>
+              </a:rPr>
+              <a:t>Compute Gap</a:t>
+            </a:r>
+            <a:r>
+              <a:rPr lang="en-US" sz="1200" b="0" i="0" kern="1200" dirty="0">
+                <a:solidFill>
+                  <a:schemeClr val="tx1"/>
+                </a:solidFill>
+                <a:effectLst/>
+                <a:latin typeface="+mn-lt"/>
+                <a:ea typeface="+mn-ea"/>
+                <a:cs typeface="+mn-cs"/>
+              </a:rPr>
+              <a:t>. Multi-Agent Debate claimed a 4% gain. But running three agents through rounds of debate consumes 6x the token budget. When the authors matched compute by giving single-agent Self-Consistency the exact same number of sample calls, standard majority voting beat debate by 1.5%.</a:t>
+            </a:r>
+          </a:p>
+          <a:p>
+            <a:endParaRPr lang="en-US" sz="1200" b="0" i="0" kern="1200" dirty="0">
+              <a:solidFill>
+                <a:schemeClr val="tx1"/>
+              </a:solidFill>
+              <a:effectLst/>
+              <a:latin typeface="+mn-lt"/>
+              <a:ea typeface="+mn-ea"/>
+              <a:cs typeface="+mn-cs"/>
+            </a:endParaRPr>
+          </a:p>
+          <a:p>
+            <a:r>
+              <a:rPr lang="en-US" sz="1200" b="0" i="0" kern="1200" dirty="0">
+                <a:solidFill>
+                  <a:schemeClr val="tx1"/>
+                </a:solidFill>
+                <a:effectLst/>
+                <a:latin typeface="+mn-lt"/>
+                <a:ea typeface="+mn-ea"/>
+                <a:cs typeface="+mn-cs"/>
+              </a:rPr>
+              <a:t>Third, the </a:t>
+            </a:r>
+            <a:r>
+              <a:rPr lang="en-US" sz="1200" b="1" i="0" kern="1200" dirty="0">
+                <a:solidFill>
+                  <a:schemeClr val="tx1"/>
+                </a:solidFill>
+                <a:effectLst/>
+                <a:latin typeface="+mn-lt"/>
+                <a:ea typeface="+mn-ea"/>
+                <a:cs typeface="+mn-cs"/>
+              </a:rPr>
+              <a:t>Prompt Trick</a:t>
+            </a:r>
+            <a:r>
+              <a:rPr lang="en-US" sz="1200" b="0" i="0" kern="1200" dirty="0">
+                <a:solidFill>
+                  <a:schemeClr val="tx1"/>
+                </a:solidFill>
+                <a:effectLst/>
+                <a:latin typeface="+mn-lt"/>
+                <a:ea typeface="+mn-ea"/>
+                <a:cs typeface="+mn-cs"/>
+              </a:rPr>
+              <a:t>. Self-Refine reported a 10% gain. However, the initial prompt omitted critical formatting rules, which were only introduced in the feedback prompt. When you provide the complete prompt from the start, the self-correction gain drops to exactly 0.0%.</a:t>
             </a:r>
           </a:p>
         </p:txBody>
@@ -28405,7 +29339,7 @@
         </p:nvSpPr>
         <p:spPr>
           <a:xfrm>
-            <a:off x="548640" y="3246120"/>
+            <a:off x="548640" y="3252426"/>
             <a:ext cx="8046720" cy="1234440"/>
           </a:xfrm>
           <a:prstGeom prst="roundRect">
@@ -28811,7 +29745,7 @@
                 <a:ea typeface="Calibri" pitchFamily="34" charset="-122"/>
                 <a:cs typeface="Calibri" pitchFamily="34" charset="-120"/>
               </a:rPr>
-              <a:t>Rules withheld</a:t>
+              <a:t>Rules omitted</a:t>
             </a:r>
             <a:endParaRPr lang="en-US" sz="1200" dirty="0"/>
           </a:p>
